--- a/assets/figures-editable/c3-c4/c4-e19.pptx
+++ b/assets/figures-editable/c3-c4/c4-e19.pptx
@@ -3104,8 +3104,8 @@
         </p:nvSpPr>
         <p:spPr>
           <a:xfrm>
-            <a:off x="274320" y="137160"/>
-            <a:ext cx="11612880" cy="365760"/>
+            <a:off x="274320" y="118872"/>
+            <a:ext cx="11612880" cy="340105"/>
           </a:xfrm>
           <a:prstGeom prst="rect">
             <a:avLst/>
@@ -3114,7 +3114,7 @@
           <a:effectLst/>
         </p:spPr>
         <p:txBody>
-          <a:bodyPr wrap="square" lIns="27432" rIns="27432" tIns="18288" bIns="18288" anchor="ctr">
+          <a:bodyPr wrap="none" lIns="18288" rIns="18288" tIns="18288" bIns="18288" anchor="t">
             <a:spAutoFit/>
           </a:bodyPr>
           <a:lstStyle/>
@@ -3125,7 +3125,7 @@
               </a:spcAft>
             </a:pPr>
             <a:r>
-              <a:rPr sz="2100" b="0" i="0">
+              <a:rPr sz="1900" b="1" i="0">
                 <a:solidFill>
                   <a:srgbClr val="8EDBD4"/>
                 </a:solidFill>
@@ -3136,23 +3136,20 @@
           </a:p>
         </p:txBody>
       </p:sp>
-      <p:sp>
-        <p:nvSpPr>
-          <p:cNvPr id="3" name="C4-E19 rect 1" descr="sci-ppt:o001"/>
-          <p:cNvSpPr/>
+      <p:cxnSp>
+        <p:nvCxnSpPr>
+          <p:cNvPr id="3" name="C4-E19 line 1" descr="sci-ppt:o001"/>
+          <p:cNvCxnSpPr/>
           <p:nvPr/>
-        </p:nvSpPr>
-        <p:spPr>
-          <a:xfrm>
-            <a:off x="594360" y="1417320"/>
-            <a:ext cx="3200400" cy="1325880"/>
-          </a:xfrm>
-          <a:prstGeom prst="rect">
+        </p:nvCxnSpPr>
+        <p:spPr>
+          <a:xfrm>
+            <a:off x="914400" y="4937760"/>
+            <a:ext cx="5669280" cy="0"/>
+          </a:xfrm>
+          <a:prstGeom prst="line">
             <a:avLst/>
           </a:prstGeom>
-          <a:solidFill>
-            <a:srgbClr val="213E4B"/>
-          </a:solidFill>
           <a:ln w="19050">
             <a:solidFill>
               <a:srgbClr val="B4C7D2"/>
@@ -3160,95 +3157,21 @@
           </a:ln>
           <a:effectLst/>
         </p:spPr>
-        <p:txBody>
-          <a:bodyPr rtlCol="0" anchor="ctr"/>
-          <a:lstStyle/>
-          <a:p>
-            <a:pPr algn="ctr"/>
-          </a:p>
-        </p:txBody>
-      </p:sp>
-      <p:sp>
-        <p:nvSpPr>
-          <p:cNvPr id="4" name="C4-E19 text 2" descr="sci-ppt:o002"/>
-          <p:cNvSpPr txBox="1"/>
-          <p:nvPr/>
-        </p:nvSpPr>
-        <p:spPr>
-          <a:xfrm>
-            <a:off x="758952" y="1627632"/>
-            <a:ext cx="2871216" cy="914400"/>
-          </a:xfrm>
-          <a:prstGeom prst="rect">
-            <a:avLst/>
-          </a:prstGeom>
-          <a:noFill/>
-          <a:effectLst/>
-        </p:spPr>
-        <p:txBody>
-          <a:bodyPr wrap="square" lIns="27432" rIns="27432" tIns="18288" bIns="18288" anchor="ctr">
-            <a:spAutoFit/>
-          </a:bodyPr>
-          <a:lstStyle/>
-          <a:p>
-            <a:pPr algn="l">
-              <a:spcAft>
-                <a:spcPts val="0"/>
-              </a:spcAft>
-            </a:pPr>
-            <a:r>
-              <a:rPr sz="1800" b="0" i="0">
-                <a:solidFill>
-                  <a:srgbClr val="E7F0F3"/>
-                </a:solidFill>
-                <a:latin typeface="Arial"/>
-              </a:rPr>
-              <a:t>Plate storage U_b</a:t>
-            </a:r>
-          </a:p>
-        </p:txBody>
-      </p:sp>
+      </p:cxnSp>
       <p:cxnSp>
         <p:nvCxnSpPr>
-          <p:cNvPr id="5" name="C4-E19 arrow 3" descr="sci-ppt:o003"/>
+          <p:cNvPr id="4" name="C4-E19 line 2" descr="sci-ppt:o002"/>
           <p:cNvCxnSpPr/>
           <p:nvPr/>
         </p:nvCxnSpPr>
         <p:spPr>
           <a:xfrm>
-            <a:off x="3794760" y="2057400"/>
-            <a:ext cx="640080" cy="0"/>
+            <a:off x="914400" y="1371600"/>
+            <a:ext cx="0" cy="3566160"/>
           </a:xfrm>
           <a:prstGeom prst="line">
             <a:avLst/>
           </a:prstGeom>
-          <a:ln w="25400">
-            <a:solidFill>
-              <a:srgbClr val="8EDBD4"/>
-            </a:solidFill>
-            <a:headEnd type="none" w="med" len="med"/>
-            <a:tailEnd type="triangle" w="med" len="med"/>
-          </a:ln>
-          <a:effectLst/>
-        </p:spPr>
-      </p:cxnSp>
-      <p:sp>
-        <p:nvSpPr>
-          <p:cNvPr id="6" name="C4-E19 rect 4" descr="sci-ppt:o004"/>
-          <p:cNvSpPr/>
-          <p:nvPr/>
-        </p:nvSpPr>
-        <p:spPr>
-          <a:xfrm>
-            <a:off x="4480560" y="1417320"/>
-            <a:ext cx="3200400" cy="1325880"/>
-          </a:xfrm>
-          <a:prstGeom prst="rect">
-            <a:avLst/>
-          </a:prstGeom>
-          <a:solidFill>
-            <a:srgbClr val="213E4B"/>
-          </a:solidFill>
           <a:ln w="19050">
             <a:solidFill>
               <a:srgbClr val="B4C7D2"/>
@@ -3256,14 +3179,51 @@
           </a:ln>
           <a:effectLst/>
         </p:spPr>
-        <p:txBody>
-          <a:bodyPr rtlCol="0" anchor="ctr"/>
-          <a:lstStyle/>
-          <a:p>
-            <a:pPr algn="ctr"/>
-          </a:p>
-        </p:txBody>
-      </p:sp>
+      </p:cxnSp>
+      <p:cxnSp>
+        <p:nvCxnSpPr>
+          <p:cNvPr id="5" name="C4-E19 line 3" descr="sci-ppt:o003"/>
+          <p:cNvCxnSpPr/>
+          <p:nvPr/>
+        </p:nvCxnSpPr>
+        <p:spPr>
+          <a:xfrm>
+            <a:off x="914400" y="4937760"/>
+            <a:ext cx="0" cy="64008"/>
+          </a:xfrm>
+          <a:prstGeom prst="line">
+            <a:avLst/>
+          </a:prstGeom>
+          <a:ln w="12700">
+            <a:solidFill>
+              <a:srgbClr val="B4C7D2"/>
+            </a:solidFill>
+          </a:ln>
+          <a:effectLst/>
+        </p:spPr>
+      </p:cxnSp>
+      <p:cxnSp>
+        <p:nvCxnSpPr>
+          <p:cNvPr id="6" name="C4-E19 line 4" descr="sci-ppt:o004"/>
+          <p:cNvCxnSpPr/>
+          <p:nvPr/>
+        </p:nvCxnSpPr>
+        <p:spPr>
+          <a:xfrm>
+            <a:off x="914400" y="1371600"/>
+            <a:ext cx="0" cy="3566160"/>
+          </a:xfrm>
+          <a:prstGeom prst="line">
+            <a:avLst/>
+          </a:prstGeom>
+          <a:ln w="7620">
+            <a:solidFill>
+              <a:srgbClr val="2E4756"/>
+            </a:solidFill>
+          </a:ln>
+          <a:effectLst/>
+        </p:spPr>
+      </p:cxnSp>
       <p:sp>
         <p:nvSpPr>
           <p:cNvPr id="7" name="C4-E19 text 5" descr="sci-ppt:o005"/>
@@ -3272,8 +3232,8 @@
         </p:nvSpPr>
         <p:spPr>
           <a:xfrm>
-            <a:off x="4645152" y="1627632"/>
-            <a:ext cx="2871216" cy="914400"/>
+            <a:off x="457200" y="5020056"/>
+            <a:ext cx="914400" cy="208407"/>
           </a:xfrm>
           <a:prstGeom prst="rect">
             <a:avLst/>
@@ -3282,84 +3242,72 @@
           <a:effectLst/>
         </p:spPr>
         <p:txBody>
-          <a:bodyPr wrap="square" lIns="27432" rIns="27432" tIns="18288" bIns="18288" anchor="ctr">
+          <a:bodyPr wrap="none" lIns="18288" rIns="18288" tIns="18288" bIns="18288" anchor="t">
             <a:spAutoFit/>
           </a:bodyPr>
           <a:lstStyle/>
           <a:p>
-            <a:pPr algn="l">
+            <a:pPr algn="ctr">
               <a:spcAft>
                 <a:spcPts val="0"/>
               </a:spcAft>
             </a:pPr>
             <a:r>
-              <a:rPr sz="1800" b="0" i="0">
+              <a:rPr sz="1050" b="0" i="0">
                 <a:solidFill>
-                  <a:srgbClr val="E7F0F3"/>
+                  <a:srgbClr val="B4C7D2"/>
                 </a:solidFill>
                 <a:latin typeface="Arial"/>
               </a:rPr>
-              <a:t>Source potential −p₀V_bl</a:t>
+              <a:t>0.00</a:t>
             </a:r>
           </a:p>
         </p:txBody>
       </p:sp>
       <p:cxnSp>
         <p:nvCxnSpPr>
-          <p:cNvPr id="8" name="C4-E19 arrow 6" descr="sci-ppt:o006"/>
+          <p:cNvPr id="8" name="C4-E19 line 6" descr="sci-ppt:o006"/>
           <p:cNvCxnSpPr/>
           <p:nvPr/>
         </p:nvCxnSpPr>
         <p:spPr>
           <a:xfrm>
-            <a:off x="7680960" y="2057400"/>
-            <a:ext cx="640080" cy="0"/>
+            <a:off x="2331720" y="4937760"/>
+            <a:ext cx="0" cy="64008"/>
           </a:xfrm>
           <a:prstGeom prst="line">
             <a:avLst/>
           </a:prstGeom>
-          <a:ln w="25400">
-            <a:solidFill>
-              <a:srgbClr val="8EDBD4"/>
-            </a:solidFill>
-            <a:headEnd type="none" w="med" len="med"/>
-            <a:tailEnd type="triangle" w="med" len="med"/>
-          </a:ln>
-          <a:effectLst/>
-        </p:spPr>
-      </p:cxnSp>
-      <p:sp>
-        <p:nvSpPr>
-          <p:cNvPr id="9" name="C4-E19 rect 7" descr="sci-ppt:o007"/>
-          <p:cNvSpPr/>
-          <p:nvPr/>
-        </p:nvSpPr>
-        <p:spPr>
-          <a:xfrm>
-            <a:off x="8366760" y="1417320"/>
-            <a:ext cx="3200400" cy="1325880"/>
-          </a:xfrm>
-          <a:prstGeom prst="rect">
-            <a:avLst/>
-          </a:prstGeom>
-          <a:solidFill>
-            <a:srgbClr val="213E4B"/>
-          </a:solidFill>
-          <a:ln w="19050">
+          <a:ln w="12700">
             <a:solidFill>
               <a:srgbClr val="B4C7D2"/>
             </a:solidFill>
           </a:ln>
           <a:effectLst/>
         </p:spPr>
-        <p:txBody>
-          <a:bodyPr rtlCol="0" anchor="ctr"/>
-          <a:lstStyle/>
-          <a:p>
-            <a:pPr algn="ctr"/>
-          </a:p>
-        </p:txBody>
-      </p:sp>
+      </p:cxnSp>
+      <p:cxnSp>
+        <p:nvCxnSpPr>
+          <p:cNvPr id="9" name="C4-E19 line 7" descr="sci-ppt:o007"/>
+          <p:cNvCxnSpPr/>
+          <p:nvPr/>
+        </p:nvCxnSpPr>
+        <p:spPr>
+          <a:xfrm>
+            <a:off x="2331720" y="1371600"/>
+            <a:ext cx="0" cy="3566160"/>
+          </a:xfrm>
+          <a:prstGeom prst="line">
+            <a:avLst/>
+          </a:prstGeom>
+          <a:ln w="7620">
+            <a:solidFill>
+              <a:srgbClr val="2E4756"/>
+            </a:solidFill>
+          </a:ln>
+          <a:effectLst/>
+        </p:spPr>
+      </p:cxnSp>
       <p:sp>
         <p:nvSpPr>
           <p:cNvPr id="10" name="C4-E19 text 8" descr="sci-ppt:o008"/>
@@ -3368,8 +3316,8 @@
         </p:nvSpPr>
         <p:spPr>
           <a:xfrm>
-            <a:off x="8531352" y="1627632"/>
-            <a:ext cx="2871216" cy="914400"/>
+            <a:off x="1874519" y="5020056"/>
+            <a:ext cx="914400" cy="208407"/>
           </a:xfrm>
           <a:prstGeom prst="rect">
             <a:avLst/>
@@ -3378,68 +3326,50 @@
           <a:effectLst/>
         </p:spPr>
         <p:txBody>
-          <a:bodyPr wrap="square" lIns="27432" rIns="27432" tIns="18288" bIns="18288" anchor="ctr">
+          <a:bodyPr wrap="none" lIns="18288" rIns="18288" tIns="18288" bIns="18288" anchor="t">
             <a:spAutoFit/>
           </a:bodyPr>
           <a:lstStyle/>
           <a:p>
-            <a:pPr algn="l">
+            <a:pPr algn="ctr">
               <a:spcAft>
                 <a:spcPts val="0"/>
               </a:spcAft>
             </a:pPr>
             <a:r>
-              <a:rPr sz="1800" b="0" i="0">
+              <a:rPr sz="1050" b="0" i="0">
                 <a:solidFill>
-                  <a:srgbClr val="E7F0F3"/>
+                  <a:srgbClr val="B4C7D2"/>
                 </a:solidFill>
                 <a:latin typeface="Arial"/>
               </a:rPr>
-              <a:t>System potential P</a:t>
-            </a:r>
-          </a:p>
-        </p:txBody>
-      </p:sp>
-      <p:sp>
-        <p:nvSpPr>
-          <p:cNvPr id="11" name="C4-E19 text 9" descr="sci-ppt:o009"/>
-          <p:cNvSpPr txBox="1"/>
+              <a:t>0.25</a:t>
+            </a:r>
+          </a:p>
+        </p:txBody>
+      </p:sp>
+      <p:cxnSp>
+        <p:nvCxnSpPr>
+          <p:cNvPr id="11" name="C4-E19 line 9" descr="sci-ppt:o009"/>
+          <p:cNvCxnSpPr/>
           <p:nvPr/>
-        </p:nvSpPr>
-        <p:spPr>
-          <a:xfrm>
-            <a:off x="731520" y="3246120"/>
-            <a:ext cx="10789920" cy="457200"/>
-          </a:xfrm>
-          <a:prstGeom prst="rect">
+        </p:nvCxnSpPr>
+        <p:spPr>
+          <a:xfrm>
+            <a:off x="3749039" y="4937760"/>
+            <a:ext cx="0" cy="64008"/>
+          </a:xfrm>
+          <a:prstGeom prst="line">
             <a:avLst/>
           </a:prstGeom>
-          <a:noFill/>
+          <a:ln w="12700">
+            <a:solidFill>
+              <a:srgbClr val="B4C7D2"/>
+            </a:solidFill>
+          </a:ln>
           <a:effectLst/>
         </p:spPr>
-        <p:txBody>
-          <a:bodyPr wrap="square" lIns="27432" rIns="27432" tIns="18288" bIns="18288" anchor="ctr">
-            <a:spAutoFit/>
-          </a:bodyPr>
-          <a:lstStyle/>
-          <a:p>
-            <a:pPr algn="l">
-              <a:spcAft>
-                <a:spcPts val="0"/>
-              </a:spcAft>
-            </a:pPr>
-            <a:r>
-              <a:rPr sz="1800" b="0" i="0">
-                <a:solidFill>
-                  <a:srgbClr val="8EDBD4"/>
-                </a:solidFill>
-                <a:latin typeface="Arial"/>
-              </a:rPr>
-              <a:t>Work, storage, fracture consumption and net impulse retain separate meanings.</a:t>
-            </a:r>
-          </a:p>
-        </p:txBody>
-      </p:sp>
+      </p:cxnSp>
       <p:cxnSp>
         <p:nvCxnSpPr>
           <p:cNvPr id="12" name="C4-E19 line 10" descr="sci-ppt:o010"/>
@@ -3448,30 +3378,114 @@
         </p:nvCxnSpPr>
         <p:spPr>
           <a:xfrm>
-            <a:off x="274320" y="3977639"/>
-            <a:ext cx="11612880" cy="0"/>
+            <a:off x="3749039" y="1371600"/>
+            <a:ext cx="0" cy="3566160"/>
+          </a:xfrm>
+          <a:prstGeom prst="line">
+            <a:avLst/>
+          </a:prstGeom>
+          <a:ln w="7620">
+            <a:solidFill>
+              <a:srgbClr val="2E4756"/>
+            </a:solidFill>
+          </a:ln>
+          <a:effectLst/>
+        </p:spPr>
+      </p:cxnSp>
+      <p:sp>
+        <p:nvSpPr>
+          <p:cNvPr id="13" name="C4-E19 text 11" descr="sci-ppt:o011"/>
+          <p:cNvSpPr txBox="1"/>
+          <p:nvPr/>
+        </p:nvSpPr>
+        <p:spPr>
+          <a:xfrm>
+            <a:off x="3291839" y="5020056"/>
+            <a:ext cx="914400" cy="208407"/>
+          </a:xfrm>
+          <a:prstGeom prst="rect">
+            <a:avLst/>
+          </a:prstGeom>
+          <a:noFill/>
+          <a:effectLst/>
+        </p:spPr>
+        <p:txBody>
+          <a:bodyPr wrap="none" lIns="18288" rIns="18288" tIns="18288" bIns="18288" anchor="t">
+            <a:spAutoFit/>
+          </a:bodyPr>
+          <a:lstStyle/>
+          <a:p>
+            <a:pPr algn="ctr">
+              <a:spcAft>
+                <a:spcPts val="0"/>
+              </a:spcAft>
+            </a:pPr>
+            <a:r>
+              <a:rPr sz="1050" b="0" i="0">
+                <a:solidFill>
+                  <a:srgbClr val="B4C7D2"/>
+                </a:solidFill>
+                <a:latin typeface="Arial"/>
+              </a:rPr>
+              <a:t>0.50</a:t>
+            </a:r>
+          </a:p>
+        </p:txBody>
+      </p:sp>
+      <p:cxnSp>
+        <p:nvCxnSpPr>
+          <p:cNvPr id="14" name="C4-E19 line 12" descr="sci-ppt:o012"/>
+          <p:cNvCxnSpPr/>
+          <p:nvPr/>
+        </p:nvCxnSpPr>
+        <p:spPr>
+          <a:xfrm>
+            <a:off x="5166360" y="4937760"/>
+            <a:ext cx="0" cy="64008"/>
           </a:xfrm>
           <a:prstGeom prst="line">
             <a:avLst/>
           </a:prstGeom>
           <a:ln w="12700">
             <a:solidFill>
-              <a:srgbClr val="405967"/>
+              <a:srgbClr val="B4C7D2"/>
             </a:solidFill>
           </a:ln>
           <a:effectLst/>
         </p:spPr>
       </p:cxnSp>
-      <p:sp>
-        <p:nvSpPr>
-          <p:cNvPr id="13" name="C4-E19 text 11" descr="sci-ppt:o011"/>
+      <p:cxnSp>
+        <p:nvCxnSpPr>
+          <p:cNvPr id="15" name="C4-E19 line 13" descr="sci-ppt:o013"/>
+          <p:cNvCxnSpPr/>
+          <p:nvPr/>
+        </p:nvCxnSpPr>
+        <p:spPr>
+          <a:xfrm>
+            <a:off x="5166360" y="1371600"/>
+            <a:ext cx="0" cy="3566160"/>
+          </a:xfrm>
+          <a:prstGeom prst="line">
+            <a:avLst/>
+          </a:prstGeom>
+          <a:ln w="7620">
+            <a:solidFill>
+              <a:srgbClr val="2E4756"/>
+            </a:solidFill>
+          </a:ln>
+          <a:effectLst/>
+        </p:spPr>
+      </p:cxnSp>
+      <p:sp>
+        <p:nvSpPr>
+          <p:cNvPr id="16" name="C4-E19 text 14" descr="sci-ppt:o014"/>
           <p:cNvSpPr txBox="1"/>
           <p:nvPr/>
         </p:nvSpPr>
         <p:spPr>
           <a:xfrm>
-            <a:off x="320040" y="4096512"/>
-            <a:ext cx="5715000" cy="246888"/>
+            <a:off x="4709160" y="5020056"/>
+            <a:ext cx="914400" cy="208407"/>
           </a:xfrm>
           <a:prstGeom prst="rect">
             <a:avLst/>
@@ -3480,7 +3494,591 @@
           <a:effectLst/>
         </p:spPr>
         <p:txBody>
-          <a:bodyPr wrap="square" lIns="27432" rIns="27432" tIns="18288" bIns="18288" anchor="ctr">
+          <a:bodyPr wrap="none" lIns="18288" rIns="18288" tIns="18288" bIns="18288" anchor="t">
+            <a:spAutoFit/>
+          </a:bodyPr>
+          <a:lstStyle/>
+          <a:p>
+            <a:pPr algn="ctr">
+              <a:spcAft>
+                <a:spcPts val="0"/>
+              </a:spcAft>
+            </a:pPr>
+            <a:r>
+              <a:rPr sz="1050" b="0" i="0">
+                <a:solidFill>
+                  <a:srgbClr val="B4C7D2"/>
+                </a:solidFill>
+                <a:latin typeface="Arial"/>
+              </a:rPr>
+              <a:t>0.75</a:t>
+            </a:r>
+          </a:p>
+        </p:txBody>
+      </p:sp>
+      <p:cxnSp>
+        <p:nvCxnSpPr>
+          <p:cNvPr id="17" name="C4-E19 line 15" descr="sci-ppt:o015"/>
+          <p:cNvCxnSpPr/>
+          <p:nvPr/>
+        </p:nvCxnSpPr>
+        <p:spPr>
+          <a:xfrm>
+            <a:off x="6583680" y="4937760"/>
+            <a:ext cx="0" cy="64008"/>
+          </a:xfrm>
+          <a:prstGeom prst="line">
+            <a:avLst/>
+          </a:prstGeom>
+          <a:ln w="12700">
+            <a:solidFill>
+              <a:srgbClr val="B4C7D2"/>
+            </a:solidFill>
+          </a:ln>
+          <a:effectLst/>
+        </p:spPr>
+      </p:cxnSp>
+      <p:cxnSp>
+        <p:nvCxnSpPr>
+          <p:cNvPr id="18" name="C4-E19 line 16" descr="sci-ppt:o016"/>
+          <p:cNvCxnSpPr/>
+          <p:nvPr/>
+        </p:nvCxnSpPr>
+        <p:spPr>
+          <a:xfrm>
+            <a:off x="6583680" y="1371600"/>
+            <a:ext cx="0" cy="3566160"/>
+          </a:xfrm>
+          <a:prstGeom prst="line">
+            <a:avLst/>
+          </a:prstGeom>
+          <a:ln w="7620">
+            <a:solidFill>
+              <a:srgbClr val="2E4756"/>
+            </a:solidFill>
+          </a:ln>
+          <a:effectLst/>
+        </p:spPr>
+      </p:cxnSp>
+      <p:sp>
+        <p:nvSpPr>
+          <p:cNvPr id="19" name="C4-E19 text 17" descr="sci-ppt:o017"/>
+          <p:cNvSpPr txBox="1"/>
+          <p:nvPr/>
+        </p:nvSpPr>
+        <p:spPr>
+          <a:xfrm>
+            <a:off x="6126480" y="5020056"/>
+            <a:ext cx="914400" cy="208407"/>
+          </a:xfrm>
+          <a:prstGeom prst="rect">
+            <a:avLst/>
+          </a:prstGeom>
+          <a:noFill/>
+          <a:effectLst/>
+        </p:spPr>
+        <p:txBody>
+          <a:bodyPr wrap="none" lIns="18288" rIns="18288" tIns="18288" bIns="18288" anchor="t">
+            <a:spAutoFit/>
+          </a:bodyPr>
+          <a:lstStyle/>
+          <a:p>
+            <a:pPr algn="ctr">
+              <a:spcAft>
+                <a:spcPts val="0"/>
+              </a:spcAft>
+            </a:pPr>
+            <a:r>
+              <a:rPr sz="1050" b="0" i="0">
+                <a:solidFill>
+                  <a:srgbClr val="B4C7D2"/>
+                </a:solidFill>
+                <a:latin typeface="Arial"/>
+              </a:rPr>
+              <a:t>1.00</a:t>
+            </a:r>
+          </a:p>
+        </p:txBody>
+      </p:sp>
+      <p:cxnSp>
+        <p:nvCxnSpPr>
+          <p:cNvPr id="20" name="C4-E19 line 18" descr="sci-ppt:o018"/>
+          <p:cNvCxnSpPr/>
+          <p:nvPr/>
+        </p:nvCxnSpPr>
+        <p:spPr>
+          <a:xfrm>
+            <a:off x="850392" y="4775661"/>
+            <a:ext cx="64008" cy="0"/>
+          </a:xfrm>
+          <a:prstGeom prst="line">
+            <a:avLst/>
+          </a:prstGeom>
+          <a:ln w="12700">
+            <a:solidFill>
+              <a:srgbClr val="B4C7D2"/>
+            </a:solidFill>
+          </a:ln>
+          <a:effectLst/>
+        </p:spPr>
+      </p:cxnSp>
+      <p:cxnSp>
+        <p:nvCxnSpPr>
+          <p:cNvPr id="21" name="C4-E19 line 19" descr="sci-ppt:o019"/>
+          <p:cNvCxnSpPr/>
+          <p:nvPr/>
+        </p:nvCxnSpPr>
+        <p:spPr>
+          <a:xfrm>
+            <a:off x="914400" y="4775661"/>
+            <a:ext cx="5669280" cy="0"/>
+          </a:xfrm>
+          <a:prstGeom prst="line">
+            <a:avLst/>
+          </a:prstGeom>
+          <a:ln w="7620">
+            <a:solidFill>
+              <a:srgbClr val="2E4756"/>
+            </a:solidFill>
+          </a:ln>
+          <a:effectLst/>
+        </p:spPr>
+      </p:cxnSp>
+      <p:sp>
+        <p:nvSpPr>
+          <p:cNvPr id="22" name="C4-E19 text 20" descr="sci-ppt:o020"/>
+          <p:cNvSpPr txBox="1"/>
+          <p:nvPr/>
+        </p:nvSpPr>
+        <p:spPr>
+          <a:xfrm>
+            <a:off x="45720" y="4693365"/>
+            <a:ext cx="777240" cy="208407"/>
+          </a:xfrm>
+          <a:prstGeom prst="rect">
+            <a:avLst/>
+          </a:prstGeom>
+          <a:noFill/>
+          <a:effectLst/>
+        </p:spPr>
+        <p:txBody>
+          <a:bodyPr wrap="none" lIns="18288" rIns="18288" tIns="18288" bIns="18288" anchor="t">
+            <a:spAutoFit/>
+          </a:bodyPr>
+          <a:lstStyle/>
+          <a:p>
+            <a:pPr algn="r">
+              <a:spcAft>
+                <a:spcPts val="0"/>
+              </a:spcAft>
+            </a:pPr>
+            <a:r>
+              <a:rPr sz="1050" b="0" i="0">
+                <a:solidFill>
+                  <a:srgbClr val="B4C7D2"/>
+                </a:solidFill>
+                <a:latin typeface="Arial"/>
+              </a:rPr>
+              <a:t>-1</a:t>
+            </a:r>
+          </a:p>
+        </p:txBody>
+      </p:sp>
+      <p:cxnSp>
+        <p:nvCxnSpPr>
+          <p:cNvPr id="23" name="C4-E19 line 21" descr="sci-ppt:o021"/>
+          <p:cNvCxnSpPr/>
+          <p:nvPr/>
+        </p:nvCxnSpPr>
+        <p:spPr>
+          <a:xfrm>
+            <a:off x="850392" y="3965170"/>
+            <a:ext cx="64008" cy="0"/>
+          </a:xfrm>
+          <a:prstGeom prst="line">
+            <a:avLst/>
+          </a:prstGeom>
+          <a:ln w="12700">
+            <a:solidFill>
+              <a:srgbClr val="B4C7D2"/>
+            </a:solidFill>
+          </a:ln>
+          <a:effectLst/>
+        </p:spPr>
+      </p:cxnSp>
+      <p:cxnSp>
+        <p:nvCxnSpPr>
+          <p:cNvPr id="24" name="C4-E19 line 22" descr="sci-ppt:o022"/>
+          <p:cNvCxnSpPr/>
+          <p:nvPr/>
+        </p:nvCxnSpPr>
+        <p:spPr>
+          <a:xfrm>
+            <a:off x="914400" y="3965170"/>
+            <a:ext cx="5669280" cy="0"/>
+          </a:xfrm>
+          <a:prstGeom prst="line">
+            <a:avLst/>
+          </a:prstGeom>
+          <a:ln w="7620">
+            <a:solidFill>
+              <a:srgbClr val="2E4756"/>
+            </a:solidFill>
+          </a:ln>
+          <a:effectLst/>
+        </p:spPr>
+      </p:cxnSp>
+      <p:sp>
+        <p:nvSpPr>
+          <p:cNvPr id="25" name="C4-E19 text 23" descr="sci-ppt:o023"/>
+          <p:cNvSpPr txBox="1"/>
+          <p:nvPr/>
+        </p:nvSpPr>
+        <p:spPr>
+          <a:xfrm>
+            <a:off x="45720" y="3882874"/>
+            <a:ext cx="777240" cy="208407"/>
+          </a:xfrm>
+          <a:prstGeom prst="rect">
+            <a:avLst/>
+          </a:prstGeom>
+          <a:noFill/>
+          <a:effectLst/>
+        </p:spPr>
+        <p:txBody>
+          <a:bodyPr wrap="none" lIns="18288" rIns="18288" tIns="18288" bIns="18288" anchor="t">
+            <a:spAutoFit/>
+          </a:bodyPr>
+          <a:lstStyle/>
+          <a:p>
+            <a:pPr algn="r">
+              <a:spcAft>
+                <a:spcPts val="0"/>
+              </a:spcAft>
+            </a:pPr>
+            <a:r>
+              <a:rPr sz="1050" b="0" i="0">
+                <a:solidFill>
+                  <a:srgbClr val="B4C7D2"/>
+                </a:solidFill>
+                <a:latin typeface="Arial"/>
+              </a:rPr>
+              <a:t>-0.5</a:t>
+            </a:r>
+          </a:p>
+        </p:txBody>
+      </p:sp>
+      <p:cxnSp>
+        <p:nvCxnSpPr>
+          <p:cNvPr id="26" name="C4-E19 line 24" descr="sci-ppt:o024"/>
+          <p:cNvCxnSpPr/>
+          <p:nvPr/>
+        </p:nvCxnSpPr>
+        <p:spPr>
+          <a:xfrm>
+            <a:off x="850392" y="3154680"/>
+            <a:ext cx="64008" cy="0"/>
+          </a:xfrm>
+          <a:prstGeom prst="line">
+            <a:avLst/>
+          </a:prstGeom>
+          <a:ln w="12700">
+            <a:solidFill>
+              <a:srgbClr val="B4C7D2"/>
+            </a:solidFill>
+          </a:ln>
+          <a:effectLst/>
+        </p:spPr>
+      </p:cxnSp>
+      <p:cxnSp>
+        <p:nvCxnSpPr>
+          <p:cNvPr id="27" name="C4-E19 line 25" descr="sci-ppt:o025"/>
+          <p:cNvCxnSpPr/>
+          <p:nvPr/>
+        </p:nvCxnSpPr>
+        <p:spPr>
+          <a:xfrm>
+            <a:off x="914400" y="3154680"/>
+            <a:ext cx="5669280" cy="0"/>
+          </a:xfrm>
+          <a:prstGeom prst="line">
+            <a:avLst/>
+          </a:prstGeom>
+          <a:ln w="7620">
+            <a:solidFill>
+              <a:srgbClr val="2E4756"/>
+            </a:solidFill>
+          </a:ln>
+          <a:effectLst/>
+        </p:spPr>
+      </p:cxnSp>
+      <p:sp>
+        <p:nvSpPr>
+          <p:cNvPr id="28" name="C4-E19 text 26" descr="sci-ppt:o026"/>
+          <p:cNvSpPr txBox="1"/>
+          <p:nvPr/>
+        </p:nvSpPr>
+        <p:spPr>
+          <a:xfrm>
+            <a:off x="45720" y="3072384"/>
+            <a:ext cx="777240" cy="208407"/>
+          </a:xfrm>
+          <a:prstGeom prst="rect">
+            <a:avLst/>
+          </a:prstGeom>
+          <a:noFill/>
+          <a:effectLst/>
+        </p:spPr>
+        <p:txBody>
+          <a:bodyPr wrap="none" lIns="18288" rIns="18288" tIns="18288" bIns="18288" anchor="t">
+            <a:spAutoFit/>
+          </a:bodyPr>
+          <a:lstStyle/>
+          <a:p>
+            <a:pPr algn="r">
+              <a:spcAft>
+                <a:spcPts val="0"/>
+              </a:spcAft>
+            </a:pPr>
+            <a:r>
+              <a:rPr sz="1050" b="0" i="0">
+                <a:solidFill>
+                  <a:srgbClr val="B4C7D2"/>
+                </a:solidFill>
+                <a:latin typeface="Arial"/>
+              </a:rPr>
+              <a:t>0</a:t>
+            </a:r>
+          </a:p>
+        </p:txBody>
+      </p:sp>
+      <p:cxnSp>
+        <p:nvCxnSpPr>
+          <p:cNvPr id="29" name="C4-E19 line 27" descr="sci-ppt:o027"/>
+          <p:cNvCxnSpPr/>
+          <p:nvPr/>
+        </p:nvCxnSpPr>
+        <p:spPr>
+          <a:xfrm>
+            <a:off x="850392" y="2344189"/>
+            <a:ext cx="64008" cy="0"/>
+          </a:xfrm>
+          <a:prstGeom prst="line">
+            <a:avLst/>
+          </a:prstGeom>
+          <a:ln w="12700">
+            <a:solidFill>
+              <a:srgbClr val="B4C7D2"/>
+            </a:solidFill>
+          </a:ln>
+          <a:effectLst/>
+        </p:spPr>
+      </p:cxnSp>
+      <p:cxnSp>
+        <p:nvCxnSpPr>
+          <p:cNvPr id="30" name="C4-E19 line 28" descr="sci-ppt:o028"/>
+          <p:cNvCxnSpPr/>
+          <p:nvPr/>
+        </p:nvCxnSpPr>
+        <p:spPr>
+          <a:xfrm>
+            <a:off x="914400" y="2344189"/>
+            <a:ext cx="5669280" cy="0"/>
+          </a:xfrm>
+          <a:prstGeom prst="line">
+            <a:avLst/>
+          </a:prstGeom>
+          <a:ln w="7620">
+            <a:solidFill>
+              <a:srgbClr val="2E4756"/>
+            </a:solidFill>
+          </a:ln>
+          <a:effectLst/>
+        </p:spPr>
+      </p:cxnSp>
+      <p:sp>
+        <p:nvSpPr>
+          <p:cNvPr id="31" name="C4-E19 text 29" descr="sci-ppt:o029"/>
+          <p:cNvSpPr txBox="1"/>
+          <p:nvPr/>
+        </p:nvSpPr>
+        <p:spPr>
+          <a:xfrm>
+            <a:off x="45720" y="2261893"/>
+            <a:ext cx="777240" cy="208407"/>
+          </a:xfrm>
+          <a:prstGeom prst="rect">
+            <a:avLst/>
+          </a:prstGeom>
+          <a:noFill/>
+          <a:effectLst/>
+        </p:spPr>
+        <p:txBody>
+          <a:bodyPr wrap="none" lIns="18288" rIns="18288" tIns="18288" bIns="18288" anchor="t">
+            <a:spAutoFit/>
+          </a:bodyPr>
+          <a:lstStyle/>
+          <a:p>
+            <a:pPr algn="r">
+              <a:spcAft>
+                <a:spcPts val="0"/>
+              </a:spcAft>
+            </a:pPr>
+            <a:r>
+              <a:rPr sz="1050" b="0" i="0">
+                <a:solidFill>
+                  <a:srgbClr val="B4C7D2"/>
+                </a:solidFill>
+                <a:latin typeface="Arial"/>
+              </a:rPr>
+              <a:t>0.5</a:t>
+            </a:r>
+          </a:p>
+        </p:txBody>
+      </p:sp>
+      <p:cxnSp>
+        <p:nvCxnSpPr>
+          <p:cNvPr id="32" name="C4-E19 line 30" descr="sci-ppt:o030"/>
+          <p:cNvCxnSpPr/>
+          <p:nvPr/>
+        </p:nvCxnSpPr>
+        <p:spPr>
+          <a:xfrm>
+            <a:off x="850392" y="1533698"/>
+            <a:ext cx="64008" cy="0"/>
+          </a:xfrm>
+          <a:prstGeom prst="line">
+            <a:avLst/>
+          </a:prstGeom>
+          <a:ln w="12700">
+            <a:solidFill>
+              <a:srgbClr val="B4C7D2"/>
+            </a:solidFill>
+          </a:ln>
+          <a:effectLst/>
+        </p:spPr>
+      </p:cxnSp>
+      <p:cxnSp>
+        <p:nvCxnSpPr>
+          <p:cNvPr id="33" name="C4-E19 line 31" descr="sci-ppt:o031"/>
+          <p:cNvCxnSpPr/>
+          <p:nvPr/>
+        </p:nvCxnSpPr>
+        <p:spPr>
+          <a:xfrm>
+            <a:off x="914400" y="1533698"/>
+            <a:ext cx="5669280" cy="0"/>
+          </a:xfrm>
+          <a:prstGeom prst="line">
+            <a:avLst/>
+          </a:prstGeom>
+          <a:ln w="7620">
+            <a:solidFill>
+              <a:srgbClr val="2E4756"/>
+            </a:solidFill>
+          </a:ln>
+          <a:effectLst/>
+        </p:spPr>
+      </p:cxnSp>
+      <p:sp>
+        <p:nvSpPr>
+          <p:cNvPr id="34" name="C4-E19 text 32" descr="sci-ppt:o032"/>
+          <p:cNvSpPr txBox="1"/>
+          <p:nvPr/>
+        </p:nvSpPr>
+        <p:spPr>
+          <a:xfrm>
+            <a:off x="45720" y="1451402"/>
+            <a:ext cx="777240" cy="208407"/>
+          </a:xfrm>
+          <a:prstGeom prst="rect">
+            <a:avLst/>
+          </a:prstGeom>
+          <a:noFill/>
+          <a:effectLst/>
+        </p:spPr>
+        <p:txBody>
+          <a:bodyPr wrap="none" lIns="18288" rIns="18288" tIns="18288" bIns="18288" anchor="t">
+            <a:spAutoFit/>
+          </a:bodyPr>
+          <a:lstStyle/>
+          <a:p>
+            <a:pPr algn="r">
+              <a:spcAft>
+                <a:spcPts val="0"/>
+              </a:spcAft>
+            </a:pPr>
+            <a:r>
+              <a:rPr sz="1050" b="0" i="0">
+                <a:solidFill>
+                  <a:srgbClr val="B4C7D2"/>
+                </a:solidFill>
+                <a:latin typeface="Arial"/>
+              </a:rPr>
+              <a:t>1</a:t>
+            </a:r>
+          </a:p>
+        </p:txBody>
+      </p:sp>
+      <p:sp>
+        <p:nvSpPr>
+          <p:cNvPr id="35" name="C4-E19 text 33" descr="sci-ppt:o033"/>
+          <p:cNvSpPr txBox="1"/>
+          <p:nvPr/>
+        </p:nvSpPr>
+        <p:spPr>
+          <a:xfrm>
+            <a:off x="914400" y="5221224"/>
+            <a:ext cx="5669280" cy="231648"/>
+          </a:xfrm>
+          <a:prstGeom prst="rect">
+            <a:avLst/>
+          </a:prstGeom>
+          <a:noFill/>
+          <a:effectLst/>
+        </p:spPr>
+        <p:txBody>
+          <a:bodyPr wrap="none" lIns="18288" rIns="18288" tIns="18288" bIns="18288" anchor="t">
+            <a:spAutoFit/>
+          </a:bodyPr>
+          <a:lstStyle/>
+          <a:p>
+            <a:pPr algn="ctr">
+              <a:spcAft>
+                <a:spcPts val="0"/>
+              </a:spcAft>
+            </a:pPr>
+            <a:r>
+              <a:rPr sz="1200" b="0" i="0">
+                <a:solidFill>
+                  <a:srgbClr val="E7F0F3"/>
+                </a:solidFill>
+                <a:latin typeface="Arial"/>
+              </a:rPr>
+              <a:t>V_bl / V*</a:t>
+            </a:r>
+          </a:p>
+        </p:txBody>
+      </p:sp>
+      <p:sp>
+        <p:nvSpPr>
+          <p:cNvPr id="36" name="C4-E19 text 34" descr="sci-ppt:o034"/>
+          <p:cNvSpPr txBox="1"/>
+          <p:nvPr/>
+        </p:nvSpPr>
+        <p:spPr>
+          <a:xfrm>
+            <a:off x="365760" y="1024128"/>
+            <a:ext cx="5669280" cy="231648"/>
+          </a:xfrm>
+          <a:prstGeom prst="rect">
+            <a:avLst/>
+          </a:prstGeom>
+          <a:noFill/>
+          <a:effectLst/>
+        </p:spPr>
+        <p:txBody>
+          <a:bodyPr wrap="none" lIns="18288" rIns="18288" tIns="18288" bIns="18288" anchor="t">
             <a:spAutoFit/>
           </a:bodyPr>
           <a:lstStyle/>
@@ -3491,27 +4089,1463 @@
               </a:spcAft>
             </a:pPr>
             <a:r>
+              <a:rPr sz="1200" b="0" i="0">
+                <a:solidFill>
+                  <a:srgbClr val="E7F0F3"/>
+                </a:solidFill>
+                <a:latin typeface="Arial"/>
+              </a:rPr>
+              <a:t>energy / (p*V*)</a:t>
+            </a:r>
+          </a:p>
+        </p:txBody>
+      </p:sp>
+      <p:sp>
+        <p:nvSpPr>
+          <p:cNvPr id="37" name="C4-E19 polygon 35" descr="sci-ppt:o035"/>
+          <p:cNvSpPr/>
+          <p:nvPr/>
+        </p:nvSpPr>
+        <p:spPr>
+          <a:xfrm>
+            <a:off x="914400" y="2344189"/>
+            <a:ext cx="5669280" cy="810491"/>
+          </a:xfrm>
+          <a:custGeom>
+            <a:avLst/>
+            <a:gdLst/>
+            <a:ahLst/>
+            <a:cxnLst/>
+            <a:rect l="l" t="t" r="r" b="b"/>
+            <a:pathLst>
+              <a:path w="5669280" h="810491">
+                <a:moveTo>
+                  <a:pt x="0" y="810491"/>
+                </a:moveTo>
+                <a:lnTo>
+                  <a:pt x="57265" y="810408"/>
+                </a:lnTo>
+                <a:lnTo>
+                  <a:pt x="114530" y="810160"/>
+                </a:lnTo>
+                <a:lnTo>
+                  <a:pt x="171796" y="809746"/>
+                </a:lnTo>
+                <a:lnTo>
+                  <a:pt x="229061" y="809167"/>
+                </a:lnTo>
+                <a:lnTo>
+                  <a:pt x="286327" y="808423"/>
+                </a:lnTo>
+                <a:lnTo>
+                  <a:pt x="343592" y="807513"/>
+                </a:lnTo>
+                <a:lnTo>
+                  <a:pt x="400858" y="806438"/>
+                </a:lnTo>
+                <a:lnTo>
+                  <a:pt x="458123" y="805198"/>
+                </a:lnTo>
+                <a:lnTo>
+                  <a:pt x="515389" y="803792"/>
+                </a:lnTo>
+                <a:lnTo>
+                  <a:pt x="572654" y="802221"/>
+                </a:lnTo>
+                <a:lnTo>
+                  <a:pt x="629920" y="800484"/>
+                </a:lnTo>
+                <a:lnTo>
+                  <a:pt x="687185" y="798582"/>
+                </a:lnTo>
+                <a:lnTo>
+                  <a:pt x="744450" y="796515"/>
+                </a:lnTo>
+                <a:lnTo>
+                  <a:pt x="801716" y="794282"/>
+                </a:lnTo>
+                <a:lnTo>
+                  <a:pt x="858981" y="791884"/>
+                </a:lnTo>
+                <a:lnTo>
+                  <a:pt x="916247" y="789321"/>
+                </a:lnTo>
+                <a:lnTo>
+                  <a:pt x="973512" y="786592"/>
+                </a:lnTo>
+                <a:lnTo>
+                  <a:pt x="1030778" y="783697"/>
+                </a:lnTo>
+                <a:lnTo>
+                  <a:pt x="1088043" y="780638"/>
+                </a:lnTo>
+                <a:lnTo>
+                  <a:pt x="1145309" y="777413"/>
+                </a:lnTo>
+                <a:lnTo>
+                  <a:pt x="1202574" y="774022"/>
+                </a:lnTo>
+                <a:lnTo>
+                  <a:pt x="1259840" y="770466"/>
+                </a:lnTo>
+                <a:lnTo>
+                  <a:pt x="1317105" y="766745"/>
+                </a:lnTo>
+                <a:lnTo>
+                  <a:pt x="1374370" y="762858"/>
+                </a:lnTo>
+                <a:lnTo>
+                  <a:pt x="1431636" y="758806"/>
+                </a:lnTo>
+                <a:lnTo>
+                  <a:pt x="1488901" y="754589"/>
+                </a:lnTo>
+                <a:lnTo>
+                  <a:pt x="1546167" y="750206"/>
+                </a:lnTo>
+                <a:lnTo>
+                  <a:pt x="1603432" y="745658"/>
+                </a:lnTo>
+                <a:lnTo>
+                  <a:pt x="1660698" y="740944"/>
+                </a:lnTo>
+                <a:lnTo>
+                  <a:pt x="1717963" y="736065"/>
+                </a:lnTo>
+                <a:lnTo>
+                  <a:pt x="1775229" y="731021"/>
+                </a:lnTo>
+                <a:lnTo>
+                  <a:pt x="1832494" y="725811"/>
+                </a:lnTo>
+                <a:lnTo>
+                  <a:pt x="1889760" y="720436"/>
+                </a:lnTo>
+                <a:lnTo>
+                  <a:pt x="1947025" y="714895"/>
+                </a:lnTo>
+                <a:lnTo>
+                  <a:pt x="2004290" y="709189"/>
+                </a:lnTo>
+                <a:lnTo>
+                  <a:pt x="2061556" y="703318"/>
+                </a:lnTo>
+                <a:lnTo>
+                  <a:pt x="2118821" y="697281"/>
+                </a:lnTo>
+                <a:lnTo>
+                  <a:pt x="2176087" y="691079"/>
+                </a:lnTo>
+                <a:lnTo>
+                  <a:pt x="2233352" y="684712"/>
+                </a:lnTo>
+                <a:lnTo>
+                  <a:pt x="2290618" y="678179"/>
+                </a:lnTo>
+                <a:lnTo>
+                  <a:pt x="2347883" y="671481"/>
+                </a:lnTo>
+                <a:lnTo>
+                  <a:pt x="2405149" y="664617"/>
+                </a:lnTo>
+                <a:lnTo>
+                  <a:pt x="2462414" y="657588"/>
+                </a:lnTo>
+                <a:lnTo>
+                  <a:pt x="2519680" y="650394"/>
+                </a:lnTo>
+                <a:lnTo>
+                  <a:pt x="2576945" y="643034"/>
+                </a:lnTo>
+                <a:lnTo>
+                  <a:pt x="2634210" y="635508"/>
+                </a:lnTo>
+                <a:lnTo>
+                  <a:pt x="2691476" y="627818"/>
+                </a:lnTo>
+                <a:lnTo>
+                  <a:pt x="2748741" y="619962"/>
+                </a:lnTo>
+                <a:lnTo>
+                  <a:pt x="2806007" y="611940"/>
+                </a:lnTo>
+                <a:lnTo>
+                  <a:pt x="2863272" y="603754"/>
+                </a:lnTo>
+                <a:lnTo>
+                  <a:pt x="2920538" y="595402"/>
+                </a:lnTo>
+                <a:lnTo>
+                  <a:pt x="2977803" y="586884"/>
+                </a:lnTo>
+                <a:lnTo>
+                  <a:pt x="3035069" y="578201"/>
+                </a:lnTo>
+                <a:lnTo>
+                  <a:pt x="3092334" y="569353"/>
+                </a:lnTo>
+                <a:lnTo>
+                  <a:pt x="3149600" y="560339"/>
+                </a:lnTo>
+                <a:lnTo>
+                  <a:pt x="3206865" y="551160"/>
+                </a:lnTo>
+                <a:lnTo>
+                  <a:pt x="3264130" y="541815"/>
+                </a:lnTo>
+                <a:lnTo>
+                  <a:pt x="3321396" y="532305"/>
+                </a:lnTo>
+                <a:lnTo>
+                  <a:pt x="3378661" y="522630"/>
+                </a:lnTo>
+                <a:lnTo>
+                  <a:pt x="3435927" y="512790"/>
+                </a:lnTo>
+                <a:lnTo>
+                  <a:pt x="3493192" y="502783"/>
+                </a:lnTo>
+                <a:lnTo>
+                  <a:pt x="3550458" y="492612"/>
+                </a:lnTo>
+                <a:lnTo>
+                  <a:pt x="3607723" y="482275"/>
+                </a:lnTo>
+                <a:lnTo>
+                  <a:pt x="3664989" y="471773"/>
+                </a:lnTo>
+                <a:lnTo>
+                  <a:pt x="3722254" y="461105"/>
+                </a:lnTo>
+                <a:lnTo>
+                  <a:pt x="3779520" y="450272"/>
+                </a:lnTo>
+                <a:lnTo>
+                  <a:pt x="3836785" y="439274"/>
+                </a:lnTo>
+                <a:lnTo>
+                  <a:pt x="3894050" y="428110"/>
+                </a:lnTo>
+                <a:lnTo>
+                  <a:pt x="3951316" y="416781"/>
+                </a:lnTo>
+                <a:lnTo>
+                  <a:pt x="4008581" y="405286"/>
+                </a:lnTo>
+                <a:lnTo>
+                  <a:pt x="4065847" y="393626"/>
+                </a:lnTo>
+                <a:lnTo>
+                  <a:pt x="4123112" y="381801"/>
+                </a:lnTo>
+                <a:lnTo>
+                  <a:pt x="4180378" y="369810"/>
+                </a:lnTo>
+                <a:lnTo>
+                  <a:pt x="4237643" y="357654"/>
+                </a:lnTo>
+                <a:lnTo>
+                  <a:pt x="4294909" y="345333"/>
+                </a:lnTo>
+                <a:lnTo>
+                  <a:pt x="4352174" y="332846"/>
+                </a:lnTo>
+                <a:lnTo>
+                  <a:pt x="4409440" y="320194"/>
+                </a:lnTo>
+                <a:lnTo>
+                  <a:pt x="4466705" y="307376"/>
+                </a:lnTo>
+                <a:lnTo>
+                  <a:pt x="4523970" y="294393"/>
+                </a:lnTo>
+                <a:lnTo>
+                  <a:pt x="4581236" y="281244"/>
+                </a:lnTo>
+                <a:lnTo>
+                  <a:pt x="4638501" y="267930"/>
+                </a:lnTo>
+                <a:lnTo>
+                  <a:pt x="4695767" y="254451"/>
+                </a:lnTo>
+                <a:lnTo>
+                  <a:pt x="4753032" y="240807"/>
+                </a:lnTo>
+                <a:lnTo>
+                  <a:pt x="4810298" y="226997"/>
+                </a:lnTo>
+                <a:lnTo>
+                  <a:pt x="4867563" y="213021"/>
+                </a:lnTo>
+                <a:lnTo>
+                  <a:pt x="4924829" y="198880"/>
+                </a:lnTo>
+                <a:lnTo>
+                  <a:pt x="4982094" y="184574"/>
+                </a:lnTo>
+                <a:lnTo>
+                  <a:pt x="5039360" y="170103"/>
+                </a:lnTo>
+                <a:lnTo>
+                  <a:pt x="5096625" y="155466"/>
+                </a:lnTo>
+                <a:lnTo>
+                  <a:pt x="5153890" y="140663"/>
+                </a:lnTo>
+                <a:lnTo>
+                  <a:pt x="5211156" y="125696"/>
+                </a:lnTo>
+                <a:lnTo>
+                  <a:pt x="5268421" y="110562"/>
+                </a:lnTo>
+                <a:lnTo>
+                  <a:pt x="5325687" y="95264"/>
+                </a:lnTo>
+                <a:lnTo>
+                  <a:pt x="5382952" y="79800"/>
+                </a:lnTo>
+                <a:lnTo>
+                  <a:pt x="5440218" y="64171"/>
+                </a:lnTo>
+                <a:lnTo>
+                  <a:pt x="5497483" y="48376"/>
+                </a:lnTo>
+                <a:lnTo>
+                  <a:pt x="5554749" y="32416"/>
+                </a:lnTo>
+                <a:lnTo>
+                  <a:pt x="5612014" y="16290"/>
+                </a:lnTo>
+                <a:lnTo>
+                  <a:pt x="5669280" y="0"/>
+                </a:lnTo>
+              </a:path>
+            </a:pathLst>
+          </a:custGeom>
+          <a:noFill/>
+          <a:ln w="38100">
+            <a:solidFill>
+              <a:srgbClr val="7FC8F8"/>
+            </a:solidFill>
+          </a:ln>
+          <a:effectLst/>
+        </p:spPr>
+        <p:txBody>
+          <a:bodyPr rtlCol="0" anchor="ctr"/>
+          <a:lstStyle/>
+          <a:p>
+            <a:pPr algn="ctr"/>
+          </a:p>
+        </p:txBody>
+      </p:sp>
+      <p:sp>
+        <p:nvSpPr>
+          <p:cNvPr id="38" name="C4-E19 polygon 36" descr="sci-ppt:o036"/>
+          <p:cNvSpPr/>
+          <p:nvPr/>
+        </p:nvSpPr>
+        <p:spPr>
+          <a:xfrm>
+            <a:off x="914400" y="3154680"/>
+            <a:ext cx="5669280" cy="1620981"/>
+          </a:xfrm>
+          <a:custGeom>
+            <a:avLst/>
+            <a:gdLst/>
+            <a:ahLst/>
+            <a:cxnLst/>
+            <a:rect l="l" t="t" r="r" b="b"/>
+            <a:pathLst>
+              <a:path w="5669280" h="1620981">
+                <a:moveTo>
+                  <a:pt x="0" y="0"/>
+                </a:moveTo>
+                <a:lnTo>
+                  <a:pt x="57265" y="16373"/>
+                </a:lnTo>
+                <a:lnTo>
+                  <a:pt x="114530" y="32747"/>
+                </a:lnTo>
+                <a:lnTo>
+                  <a:pt x="171796" y="49120"/>
+                </a:lnTo>
+                <a:lnTo>
+                  <a:pt x="229061" y="65494"/>
+                </a:lnTo>
+                <a:lnTo>
+                  <a:pt x="286327" y="81867"/>
+                </a:lnTo>
+                <a:lnTo>
+                  <a:pt x="343592" y="98241"/>
+                </a:lnTo>
+                <a:lnTo>
+                  <a:pt x="400858" y="114614"/>
+                </a:lnTo>
+                <a:lnTo>
+                  <a:pt x="458123" y="130988"/>
+                </a:lnTo>
+                <a:lnTo>
+                  <a:pt x="515389" y="147361"/>
+                </a:lnTo>
+                <a:lnTo>
+                  <a:pt x="572654" y="163735"/>
+                </a:lnTo>
+                <a:lnTo>
+                  <a:pt x="629920" y="180109"/>
+                </a:lnTo>
+                <a:lnTo>
+                  <a:pt x="687185" y="196482"/>
+                </a:lnTo>
+                <a:lnTo>
+                  <a:pt x="744450" y="212856"/>
+                </a:lnTo>
+                <a:lnTo>
+                  <a:pt x="801716" y="229229"/>
+                </a:lnTo>
+                <a:lnTo>
+                  <a:pt x="858981" y="245603"/>
+                </a:lnTo>
+                <a:lnTo>
+                  <a:pt x="916247" y="261976"/>
+                </a:lnTo>
+                <a:lnTo>
+                  <a:pt x="973512" y="278350"/>
+                </a:lnTo>
+                <a:lnTo>
+                  <a:pt x="1030778" y="294723"/>
+                </a:lnTo>
+                <a:lnTo>
+                  <a:pt x="1088043" y="311097"/>
+                </a:lnTo>
+                <a:lnTo>
+                  <a:pt x="1145309" y="327471"/>
+                </a:lnTo>
+                <a:lnTo>
+                  <a:pt x="1202574" y="343844"/>
+                </a:lnTo>
+                <a:lnTo>
+                  <a:pt x="1259840" y="360218"/>
+                </a:lnTo>
+                <a:lnTo>
+                  <a:pt x="1317105" y="376591"/>
+                </a:lnTo>
+                <a:lnTo>
+                  <a:pt x="1374370" y="392965"/>
+                </a:lnTo>
+                <a:lnTo>
+                  <a:pt x="1431636" y="409338"/>
+                </a:lnTo>
+                <a:lnTo>
+                  <a:pt x="1488901" y="425712"/>
+                </a:lnTo>
+                <a:lnTo>
+                  <a:pt x="1546167" y="442085"/>
+                </a:lnTo>
+                <a:lnTo>
+                  <a:pt x="1603432" y="458459"/>
+                </a:lnTo>
+                <a:lnTo>
+                  <a:pt x="1660698" y="474833"/>
+                </a:lnTo>
+                <a:lnTo>
+                  <a:pt x="1717963" y="491206"/>
+                </a:lnTo>
+                <a:lnTo>
+                  <a:pt x="1775229" y="507580"/>
+                </a:lnTo>
+                <a:lnTo>
+                  <a:pt x="1832494" y="523953"/>
+                </a:lnTo>
+                <a:lnTo>
+                  <a:pt x="1889760" y="540327"/>
+                </a:lnTo>
+                <a:lnTo>
+                  <a:pt x="1947025" y="556700"/>
+                </a:lnTo>
+                <a:lnTo>
+                  <a:pt x="2004290" y="573074"/>
+                </a:lnTo>
+                <a:lnTo>
+                  <a:pt x="2061556" y="589447"/>
+                </a:lnTo>
+                <a:lnTo>
+                  <a:pt x="2118821" y="605821"/>
+                </a:lnTo>
+                <a:lnTo>
+                  <a:pt x="2176087" y="622195"/>
+                </a:lnTo>
+                <a:lnTo>
+                  <a:pt x="2233352" y="638568"/>
+                </a:lnTo>
+                <a:lnTo>
+                  <a:pt x="2290618" y="654942"/>
+                </a:lnTo>
+                <a:lnTo>
+                  <a:pt x="2347883" y="671315"/>
+                </a:lnTo>
+                <a:lnTo>
+                  <a:pt x="2405149" y="687689"/>
+                </a:lnTo>
+                <a:lnTo>
+                  <a:pt x="2462414" y="704062"/>
+                </a:lnTo>
+                <a:lnTo>
+                  <a:pt x="2519680" y="720436"/>
+                </a:lnTo>
+                <a:lnTo>
+                  <a:pt x="2576945" y="736809"/>
+                </a:lnTo>
+                <a:lnTo>
+                  <a:pt x="2634210" y="753183"/>
+                </a:lnTo>
+                <a:lnTo>
+                  <a:pt x="2691476" y="769557"/>
+                </a:lnTo>
+                <a:lnTo>
+                  <a:pt x="2748741" y="785930"/>
+                </a:lnTo>
+                <a:lnTo>
+                  <a:pt x="2806007" y="802304"/>
+                </a:lnTo>
+                <a:lnTo>
+                  <a:pt x="2863272" y="818677"/>
+                </a:lnTo>
+                <a:lnTo>
+                  <a:pt x="2920538" y="835051"/>
+                </a:lnTo>
+                <a:lnTo>
+                  <a:pt x="2977803" y="851424"/>
+                </a:lnTo>
+                <a:lnTo>
+                  <a:pt x="3035069" y="867798"/>
+                </a:lnTo>
+                <a:lnTo>
+                  <a:pt x="3092334" y="884171"/>
+                </a:lnTo>
+                <a:lnTo>
+                  <a:pt x="3149600" y="900545"/>
+                </a:lnTo>
+                <a:lnTo>
+                  <a:pt x="3206865" y="916919"/>
+                </a:lnTo>
+                <a:lnTo>
+                  <a:pt x="3264130" y="933292"/>
+                </a:lnTo>
+                <a:lnTo>
+                  <a:pt x="3321396" y="949666"/>
+                </a:lnTo>
+                <a:lnTo>
+                  <a:pt x="3378661" y="966039"/>
+                </a:lnTo>
+                <a:lnTo>
+                  <a:pt x="3435927" y="982413"/>
+                </a:lnTo>
+                <a:lnTo>
+                  <a:pt x="3493192" y="998786"/>
+                </a:lnTo>
+                <a:lnTo>
+                  <a:pt x="3550458" y="1015160"/>
+                </a:lnTo>
+                <a:lnTo>
+                  <a:pt x="3607723" y="1031533"/>
+                </a:lnTo>
+                <a:lnTo>
+                  <a:pt x="3664989" y="1047907"/>
+                </a:lnTo>
+                <a:lnTo>
+                  <a:pt x="3722254" y="1064280"/>
+                </a:lnTo>
+                <a:lnTo>
+                  <a:pt x="3779520" y="1080654"/>
+                </a:lnTo>
+                <a:lnTo>
+                  <a:pt x="3836785" y="1097028"/>
+                </a:lnTo>
+                <a:lnTo>
+                  <a:pt x="3894050" y="1113401"/>
+                </a:lnTo>
+                <a:lnTo>
+                  <a:pt x="3951316" y="1129775"/>
+                </a:lnTo>
+                <a:lnTo>
+                  <a:pt x="4008581" y="1146148"/>
+                </a:lnTo>
+                <a:lnTo>
+                  <a:pt x="4065847" y="1162522"/>
+                </a:lnTo>
+                <a:lnTo>
+                  <a:pt x="4123112" y="1178895"/>
+                </a:lnTo>
+                <a:lnTo>
+                  <a:pt x="4180378" y="1195269"/>
+                </a:lnTo>
+                <a:lnTo>
+                  <a:pt x="4237643" y="1211642"/>
+                </a:lnTo>
+                <a:lnTo>
+                  <a:pt x="4294909" y="1228016"/>
+                </a:lnTo>
+                <a:lnTo>
+                  <a:pt x="4352174" y="1244390"/>
+                </a:lnTo>
+                <a:lnTo>
+                  <a:pt x="4409440" y="1260763"/>
+                </a:lnTo>
+                <a:lnTo>
+                  <a:pt x="4466705" y="1277137"/>
+                </a:lnTo>
+                <a:lnTo>
+                  <a:pt x="4523970" y="1293510"/>
+                </a:lnTo>
+                <a:lnTo>
+                  <a:pt x="4581236" y="1309884"/>
+                </a:lnTo>
+                <a:lnTo>
+                  <a:pt x="4638501" y="1326257"/>
+                </a:lnTo>
+                <a:lnTo>
+                  <a:pt x="4695767" y="1342631"/>
+                </a:lnTo>
+                <a:lnTo>
+                  <a:pt x="4753032" y="1359004"/>
+                </a:lnTo>
+                <a:lnTo>
+                  <a:pt x="4810298" y="1375378"/>
+                </a:lnTo>
+                <a:lnTo>
+                  <a:pt x="4867563" y="1391752"/>
+                </a:lnTo>
+                <a:lnTo>
+                  <a:pt x="4924829" y="1408125"/>
+                </a:lnTo>
+                <a:lnTo>
+                  <a:pt x="4982094" y="1424499"/>
+                </a:lnTo>
+                <a:lnTo>
+                  <a:pt x="5039360" y="1440872"/>
+                </a:lnTo>
+                <a:lnTo>
+                  <a:pt x="5096625" y="1457246"/>
+                </a:lnTo>
+                <a:lnTo>
+                  <a:pt x="5153890" y="1473619"/>
+                </a:lnTo>
+                <a:lnTo>
+                  <a:pt x="5211156" y="1489993"/>
+                </a:lnTo>
+                <a:lnTo>
+                  <a:pt x="5268421" y="1506366"/>
+                </a:lnTo>
+                <a:lnTo>
+                  <a:pt x="5325687" y="1522740"/>
+                </a:lnTo>
+                <a:lnTo>
+                  <a:pt x="5382952" y="1539114"/>
+                </a:lnTo>
+                <a:lnTo>
+                  <a:pt x="5440218" y="1555487"/>
+                </a:lnTo>
+                <a:lnTo>
+                  <a:pt x="5497483" y="1571861"/>
+                </a:lnTo>
+                <a:lnTo>
+                  <a:pt x="5554749" y="1588234"/>
+                </a:lnTo>
+                <a:lnTo>
+                  <a:pt x="5612014" y="1604608"/>
+                </a:lnTo>
+                <a:lnTo>
+                  <a:pt x="5669280" y="1620981"/>
+                </a:lnTo>
+              </a:path>
+            </a:pathLst>
+          </a:custGeom>
+          <a:noFill/>
+          <a:ln w="38100">
+            <a:solidFill>
+              <a:srgbClr val="F28BA0"/>
+            </a:solidFill>
+          </a:ln>
+          <a:effectLst/>
+        </p:spPr>
+        <p:txBody>
+          <a:bodyPr rtlCol="0" anchor="ctr"/>
+          <a:lstStyle/>
+          <a:p>
+            <a:pPr algn="ctr"/>
+          </a:p>
+        </p:txBody>
+      </p:sp>
+      <p:sp>
+        <p:nvSpPr>
+          <p:cNvPr id="39" name="C4-E19 polygon 37" descr="sci-ppt:o037"/>
+          <p:cNvSpPr/>
+          <p:nvPr/>
+        </p:nvSpPr>
+        <p:spPr>
+          <a:xfrm>
+            <a:off x="914400" y="3154680"/>
+            <a:ext cx="5669280" cy="810490"/>
+          </a:xfrm>
+          <a:custGeom>
+            <a:avLst/>
+            <a:gdLst/>
+            <a:ahLst/>
+            <a:cxnLst/>
+            <a:rect l="l" t="t" r="r" b="b"/>
+            <a:pathLst>
+              <a:path w="5669280" h="810490">
+                <a:moveTo>
+                  <a:pt x="0" y="0"/>
+                </a:moveTo>
+                <a:lnTo>
+                  <a:pt x="57265" y="16290"/>
+                </a:lnTo>
+                <a:lnTo>
+                  <a:pt x="114530" y="32416"/>
+                </a:lnTo>
+                <a:lnTo>
+                  <a:pt x="171796" y="48376"/>
+                </a:lnTo>
+                <a:lnTo>
+                  <a:pt x="229061" y="64171"/>
+                </a:lnTo>
+                <a:lnTo>
+                  <a:pt x="286327" y="79800"/>
+                </a:lnTo>
+                <a:lnTo>
+                  <a:pt x="343592" y="95264"/>
+                </a:lnTo>
+                <a:lnTo>
+                  <a:pt x="400858" y="110562"/>
+                </a:lnTo>
+                <a:lnTo>
+                  <a:pt x="458123" y="125695"/>
+                </a:lnTo>
+                <a:lnTo>
+                  <a:pt x="515389" y="140663"/>
+                </a:lnTo>
+                <a:lnTo>
+                  <a:pt x="572654" y="155466"/>
+                </a:lnTo>
+                <a:lnTo>
+                  <a:pt x="629920" y="170103"/>
+                </a:lnTo>
+                <a:lnTo>
+                  <a:pt x="687185" y="184574"/>
+                </a:lnTo>
+                <a:lnTo>
+                  <a:pt x="744450" y="198880"/>
+                </a:lnTo>
+                <a:lnTo>
+                  <a:pt x="801716" y="213021"/>
+                </a:lnTo>
+                <a:lnTo>
+                  <a:pt x="858981" y="226996"/>
+                </a:lnTo>
+                <a:lnTo>
+                  <a:pt x="916247" y="240807"/>
+                </a:lnTo>
+                <a:lnTo>
+                  <a:pt x="973512" y="254451"/>
+                </a:lnTo>
+                <a:lnTo>
+                  <a:pt x="1030778" y="267930"/>
+                </a:lnTo>
+                <a:lnTo>
+                  <a:pt x="1088043" y="281244"/>
+                </a:lnTo>
+                <a:lnTo>
+                  <a:pt x="1145309" y="294393"/>
+                </a:lnTo>
+                <a:lnTo>
+                  <a:pt x="1202574" y="307376"/>
+                </a:lnTo>
+                <a:lnTo>
+                  <a:pt x="1259840" y="320193"/>
+                </a:lnTo>
+                <a:lnTo>
+                  <a:pt x="1317105" y="332846"/>
+                </a:lnTo>
+                <a:lnTo>
+                  <a:pt x="1374370" y="345333"/>
+                </a:lnTo>
+                <a:lnTo>
+                  <a:pt x="1431636" y="357654"/>
+                </a:lnTo>
+                <a:lnTo>
+                  <a:pt x="1488901" y="369810"/>
+                </a:lnTo>
+                <a:lnTo>
+                  <a:pt x="1546167" y="381801"/>
+                </a:lnTo>
+                <a:lnTo>
+                  <a:pt x="1603432" y="393626"/>
+                </a:lnTo>
+                <a:lnTo>
+                  <a:pt x="1660698" y="405286"/>
+                </a:lnTo>
+                <a:lnTo>
+                  <a:pt x="1717963" y="416781"/>
+                </a:lnTo>
+                <a:lnTo>
+                  <a:pt x="1775229" y="428110"/>
+                </a:lnTo>
+                <a:lnTo>
+                  <a:pt x="1832494" y="439274"/>
+                </a:lnTo>
+                <a:lnTo>
+                  <a:pt x="1889760" y="450272"/>
+                </a:lnTo>
+                <a:lnTo>
+                  <a:pt x="1947025" y="461105"/>
+                </a:lnTo>
+                <a:lnTo>
+                  <a:pt x="2004290" y="471773"/>
+                </a:lnTo>
+                <a:lnTo>
+                  <a:pt x="2061556" y="482275"/>
+                </a:lnTo>
+                <a:lnTo>
+                  <a:pt x="2118821" y="492612"/>
+                </a:lnTo>
+                <a:lnTo>
+                  <a:pt x="2176087" y="502783"/>
+                </a:lnTo>
+                <a:lnTo>
+                  <a:pt x="2233352" y="512789"/>
+                </a:lnTo>
+                <a:lnTo>
+                  <a:pt x="2290618" y="522630"/>
+                </a:lnTo>
+                <a:lnTo>
+                  <a:pt x="2347883" y="532305"/>
+                </a:lnTo>
+                <a:lnTo>
+                  <a:pt x="2405149" y="541815"/>
+                </a:lnTo>
+                <a:lnTo>
+                  <a:pt x="2462414" y="551160"/>
+                </a:lnTo>
+                <a:lnTo>
+                  <a:pt x="2519680" y="560339"/>
+                </a:lnTo>
+                <a:lnTo>
+                  <a:pt x="2576945" y="569353"/>
+                </a:lnTo>
+                <a:lnTo>
+                  <a:pt x="2634210" y="578201"/>
+                </a:lnTo>
+                <a:lnTo>
+                  <a:pt x="2691476" y="586884"/>
+                </a:lnTo>
+                <a:lnTo>
+                  <a:pt x="2748741" y="595401"/>
+                </a:lnTo>
+                <a:lnTo>
+                  <a:pt x="2806007" y="603754"/>
+                </a:lnTo>
+                <a:lnTo>
+                  <a:pt x="2863272" y="611940"/>
+                </a:lnTo>
+                <a:lnTo>
+                  <a:pt x="2920538" y="619962"/>
+                </a:lnTo>
+                <a:lnTo>
+                  <a:pt x="2977803" y="627818"/>
+                </a:lnTo>
+                <a:lnTo>
+                  <a:pt x="3035069" y="635508"/>
+                </a:lnTo>
+                <a:lnTo>
+                  <a:pt x="3092334" y="643034"/>
+                </a:lnTo>
+                <a:lnTo>
+                  <a:pt x="3149600" y="650393"/>
+                </a:lnTo>
+                <a:lnTo>
+                  <a:pt x="3206865" y="657588"/>
+                </a:lnTo>
+                <a:lnTo>
+                  <a:pt x="3264130" y="664617"/>
+                </a:lnTo>
+                <a:lnTo>
+                  <a:pt x="3321396" y="671481"/>
+                </a:lnTo>
+                <a:lnTo>
+                  <a:pt x="3378661" y="678179"/>
+                </a:lnTo>
+                <a:lnTo>
+                  <a:pt x="3435927" y="684712"/>
+                </a:lnTo>
+                <a:lnTo>
+                  <a:pt x="3493192" y="691079"/>
+                </a:lnTo>
+                <a:lnTo>
+                  <a:pt x="3550458" y="697281"/>
+                </a:lnTo>
+                <a:lnTo>
+                  <a:pt x="3607723" y="703318"/>
+                </a:lnTo>
+                <a:lnTo>
+                  <a:pt x="3664989" y="709189"/>
+                </a:lnTo>
+                <a:lnTo>
+                  <a:pt x="3722254" y="714895"/>
+                </a:lnTo>
+                <a:lnTo>
+                  <a:pt x="3779520" y="720436"/>
+                </a:lnTo>
+                <a:lnTo>
+                  <a:pt x="3836785" y="725811"/>
+                </a:lnTo>
+                <a:lnTo>
+                  <a:pt x="3894050" y="731021"/>
+                </a:lnTo>
+                <a:lnTo>
+                  <a:pt x="3951316" y="736065"/>
+                </a:lnTo>
+                <a:lnTo>
+                  <a:pt x="4008581" y="740944"/>
+                </a:lnTo>
+                <a:lnTo>
+                  <a:pt x="4065847" y="745658"/>
+                </a:lnTo>
+                <a:lnTo>
+                  <a:pt x="4123112" y="750206"/>
+                </a:lnTo>
+                <a:lnTo>
+                  <a:pt x="4180378" y="754589"/>
+                </a:lnTo>
+                <a:lnTo>
+                  <a:pt x="4237643" y="758806"/>
+                </a:lnTo>
+                <a:lnTo>
+                  <a:pt x="4294909" y="762858"/>
+                </a:lnTo>
+                <a:lnTo>
+                  <a:pt x="4352174" y="766745"/>
+                </a:lnTo>
+                <a:lnTo>
+                  <a:pt x="4409440" y="770466"/>
+                </a:lnTo>
+                <a:lnTo>
+                  <a:pt x="4466705" y="774022"/>
+                </a:lnTo>
+                <a:lnTo>
+                  <a:pt x="4523970" y="777413"/>
+                </a:lnTo>
+                <a:lnTo>
+                  <a:pt x="4581236" y="780638"/>
+                </a:lnTo>
+                <a:lnTo>
+                  <a:pt x="4638501" y="783697"/>
+                </a:lnTo>
+                <a:lnTo>
+                  <a:pt x="4695767" y="786592"/>
+                </a:lnTo>
+                <a:lnTo>
+                  <a:pt x="4753032" y="789321"/>
+                </a:lnTo>
+                <a:lnTo>
+                  <a:pt x="4810298" y="791884"/>
+                </a:lnTo>
+                <a:lnTo>
+                  <a:pt x="4867563" y="794282"/>
+                </a:lnTo>
+                <a:lnTo>
+                  <a:pt x="4924829" y="796515"/>
+                </a:lnTo>
+                <a:lnTo>
+                  <a:pt x="4982094" y="798582"/>
+                </a:lnTo>
+                <a:lnTo>
+                  <a:pt x="5039360" y="800484"/>
+                </a:lnTo>
+                <a:lnTo>
+                  <a:pt x="5096625" y="802221"/>
+                </a:lnTo>
+                <a:lnTo>
+                  <a:pt x="5153890" y="803792"/>
+                </a:lnTo>
+                <a:lnTo>
+                  <a:pt x="5211156" y="805198"/>
+                </a:lnTo>
+                <a:lnTo>
+                  <a:pt x="5268421" y="806438"/>
+                </a:lnTo>
+                <a:lnTo>
+                  <a:pt x="5325687" y="807513"/>
+                </a:lnTo>
+                <a:lnTo>
+                  <a:pt x="5382952" y="808423"/>
+                </a:lnTo>
+                <a:lnTo>
+                  <a:pt x="5440218" y="809167"/>
+                </a:lnTo>
+                <a:lnTo>
+                  <a:pt x="5497483" y="809746"/>
+                </a:lnTo>
+                <a:lnTo>
+                  <a:pt x="5554749" y="810160"/>
+                </a:lnTo>
+                <a:lnTo>
+                  <a:pt x="5612014" y="810408"/>
+                </a:lnTo>
+                <a:lnTo>
+                  <a:pt x="5669280" y="810490"/>
+                </a:lnTo>
+              </a:path>
+            </a:pathLst>
+          </a:custGeom>
+          <a:noFill/>
+          <a:ln w="43180">
+            <a:solidFill>
+              <a:srgbClr val="8EDBD4"/>
+            </a:solidFill>
+          </a:ln>
+          <a:effectLst/>
+        </p:spPr>
+        <p:txBody>
+          <a:bodyPr rtlCol="0" anchor="ctr"/>
+          <a:lstStyle/>
+          <a:p>
+            <a:pPr algn="ctr"/>
+          </a:p>
+        </p:txBody>
+      </p:sp>
+      <p:cxnSp>
+        <p:nvCxnSpPr>
+          <p:cNvPr id="40" name="C4-E19 line 38" descr="sci-ppt:o038"/>
+          <p:cNvCxnSpPr/>
+          <p:nvPr/>
+        </p:nvCxnSpPr>
+        <p:spPr>
+          <a:xfrm>
+            <a:off x="914400" y="3154680"/>
+            <a:ext cx="5669280" cy="0"/>
+          </a:xfrm>
+          <a:prstGeom prst="line">
+            <a:avLst/>
+          </a:prstGeom>
+          <a:ln w="15240">
+            <a:solidFill>
+              <a:srgbClr val="2E4756"/>
+            </a:solidFill>
+          </a:ln>
+          <a:effectLst/>
+        </p:spPr>
+      </p:cxnSp>
+      <p:sp>
+        <p:nvSpPr>
+          <p:cNvPr id="41" name="C4-E19 text 39" descr="sci-ppt:o039"/>
+          <p:cNvSpPr txBox="1"/>
+          <p:nvPr/>
+        </p:nvSpPr>
+        <p:spPr>
+          <a:xfrm>
+            <a:off x="1554480" y="1776845"/>
+            <a:ext cx="2560320" cy="223900"/>
+          </a:xfrm>
+          <a:prstGeom prst="rect">
+            <a:avLst/>
+          </a:prstGeom>
+          <a:noFill/>
+          <a:effectLst/>
+        </p:spPr>
+        <p:txBody>
+          <a:bodyPr wrap="none" lIns="18288" rIns="18288" tIns="18288" bIns="18288" anchor="t">
+            <a:spAutoFit/>
+          </a:bodyPr>
+          <a:lstStyle/>
+          <a:p>
+            <a:pPr algn="l">
+              <a:spcAft>
+                <a:spcPts val="0"/>
+              </a:spcAft>
+            </a:pPr>
+            <a:r>
               <a:rPr sz="1150" b="0" i="0">
+                <a:solidFill>
+                  <a:srgbClr val="7FC8F8"/>
+                </a:solidFill>
+                <a:latin typeface="Arial"/>
+              </a:rPr>
+              <a:t>U_b = V²/(2C_b)  (stored)</a:t>
+            </a:r>
+          </a:p>
+        </p:txBody>
+      </p:sp>
+      <p:sp>
+        <p:nvSpPr>
+          <p:cNvPr id="42" name="C4-E19 text 40" descr="sci-ppt:o040"/>
+          <p:cNvSpPr txBox="1"/>
+          <p:nvPr/>
+        </p:nvSpPr>
+        <p:spPr>
+          <a:xfrm>
+            <a:off x="1441094" y="4451465"/>
+            <a:ext cx="2377440" cy="223900"/>
+          </a:xfrm>
+          <a:prstGeom prst="rect">
+            <a:avLst/>
+          </a:prstGeom>
+          <a:noFill/>
+          <a:effectLst/>
+        </p:spPr>
+        <p:txBody>
+          <a:bodyPr wrap="none" lIns="18288" rIns="18288" tIns="18288" bIns="18288" anchor="t">
+            <a:spAutoFit/>
+          </a:bodyPr>
+          <a:lstStyle/>
+          <a:p>
+            <a:pPr algn="l">
+              <a:spcAft>
+                <a:spcPts val="0"/>
+              </a:spcAft>
+            </a:pPr>
+            <a:r>
+              <a:rPr sz="1150" b="0" i="0">
+                <a:solidFill>
+                  <a:srgbClr val="F28BA0"/>
+                </a:solidFill>
+                <a:latin typeface="Arial"/>
+              </a:rPr>
+              <a:t>−p₀V  (source work)</a:t>
+            </a:r>
+          </a:p>
+        </p:txBody>
+      </p:sp>
+      <p:sp>
+        <p:nvSpPr>
+          <p:cNvPr id="43" name="C4-E19 ellipse 41" descr="sci-ppt:o041"/>
+          <p:cNvSpPr/>
+          <p:nvPr/>
+        </p:nvSpPr>
+        <p:spPr>
+          <a:xfrm>
+            <a:off x="6510528" y="3892018"/>
+            <a:ext cx="146304" cy="146304"/>
+          </a:xfrm>
+          <a:prstGeom prst="ellipse">
+            <a:avLst/>
+          </a:prstGeom>
+          <a:solidFill>
+            <a:srgbClr val="F2B880"/>
+          </a:solidFill>
+          <a:ln w="12700">
+            <a:solidFill>
+              <a:srgbClr val="F2B880"/>
+            </a:solidFill>
+          </a:ln>
+          <a:effectLst/>
+        </p:spPr>
+        <p:txBody>
+          <a:bodyPr rtlCol="0" anchor="ctr"/>
+          <a:lstStyle/>
+          <a:p>
+            <a:pPr algn="ctr"/>
+          </a:p>
+        </p:txBody>
+      </p:sp>
+      <p:sp>
+        <p:nvSpPr>
+          <p:cNvPr id="44" name="C4-E19 text 42" descr="sci-ppt:o042"/>
+          <p:cNvSpPr txBox="1"/>
+          <p:nvPr/>
+        </p:nvSpPr>
+        <p:spPr>
+          <a:xfrm>
+            <a:off x="4846320" y="3690850"/>
+            <a:ext cx="1645920" cy="231648"/>
+          </a:xfrm>
+          <a:prstGeom prst="rect">
+            <a:avLst/>
+          </a:prstGeom>
+          <a:noFill/>
+          <a:effectLst/>
+        </p:spPr>
+        <p:txBody>
+          <a:bodyPr wrap="none" lIns="18288" rIns="18288" tIns="18288" bIns="18288" anchor="t">
+            <a:spAutoFit/>
+          </a:bodyPr>
+          <a:lstStyle/>
+          <a:p>
+            <a:pPr algn="l">
+              <a:spcAft>
+                <a:spcPts val="0"/>
+              </a:spcAft>
+            </a:pPr>
+            <a:r>
+              <a:rPr sz="1200" b="0" i="0">
+                <a:solidFill>
+                  <a:srgbClr val="F2B880"/>
+                </a:solidFill>
+                <a:latin typeface="Arial"/>
+              </a:rPr>
+              <a:t>𝒫 = −p₀V/2</a:t>
+            </a:r>
+          </a:p>
+        </p:txBody>
+      </p:sp>
+      <p:sp>
+        <p:nvSpPr>
+          <p:cNvPr id="45" name="C4-E19 round_rect 43" descr="sci-ppt:o043"/>
+          <p:cNvSpPr/>
+          <p:nvPr/>
+        </p:nvSpPr>
+        <p:spPr>
+          <a:xfrm>
+            <a:off x="6858000" y="1371600"/>
+            <a:ext cx="4983480" cy="3566160"/>
+          </a:xfrm>
+          <a:prstGeom prst="roundRect">
+            <a:avLst/>
+          </a:prstGeom>
+          <a:solidFill>
+            <a:srgbClr val="213E4B"/>
+          </a:solidFill>
+          <a:ln w="20320">
+            <a:solidFill>
+              <a:srgbClr val="8EDBD4"/>
+            </a:solidFill>
+          </a:ln>
+          <a:effectLst/>
+        </p:spPr>
+        <p:txBody>
+          <a:bodyPr rtlCol="0" anchor="ctr"/>
+          <a:lstStyle/>
+          <a:p>
+            <a:pPr algn="ctr"/>
+          </a:p>
+        </p:txBody>
+      </p:sp>
+      <p:sp>
+        <p:nvSpPr>
+          <p:cNvPr id="46" name="C4-E19 text 44" descr="sci-ppt:o044"/>
+          <p:cNvSpPr txBox="1"/>
+          <p:nvPr/>
+        </p:nvSpPr>
+        <p:spPr>
+          <a:xfrm>
+            <a:off x="6967728" y="1426464"/>
+            <a:ext cx="4764024" cy="254889"/>
+          </a:xfrm>
+          <a:prstGeom prst="rect">
+            <a:avLst/>
+          </a:prstGeom>
+          <a:noFill/>
+          <a:effectLst/>
+        </p:spPr>
+        <p:txBody>
+          <a:bodyPr wrap="none" lIns="18288" rIns="18288" tIns="18288" bIns="18288" anchor="t">
+            <a:spAutoFit/>
+          </a:bodyPr>
+          <a:lstStyle/>
+          <a:p>
+            <a:pPr algn="l">
+              <a:spcAft>
+                <a:spcPts val="0"/>
+              </a:spcAft>
+            </a:pPr>
+            <a:r>
+              <a:rPr sz="1350" b="1" i="0">
+                <a:solidFill>
+                  <a:srgbClr val="8EDBD4"/>
+                </a:solidFill>
+                <a:latin typeface="Arial"/>
+              </a:rPr>
+              <a:t>Maintained pressure</a:t>
+            </a:r>
+          </a:p>
+        </p:txBody>
+      </p:sp>
+      <p:sp>
+        <p:nvSpPr>
+          <p:cNvPr id="47" name="C4-E19 text 45" descr="sci-ppt:o045"/>
+          <p:cNvSpPr txBox="1"/>
+          <p:nvPr/>
+        </p:nvSpPr>
+        <p:spPr>
+          <a:xfrm>
+            <a:off x="6995160" y="1828800"/>
+            <a:ext cx="4754880" cy="223900"/>
+          </a:xfrm>
+          <a:prstGeom prst="rect">
+            <a:avLst/>
+          </a:prstGeom>
+          <a:noFill/>
+          <a:effectLst/>
+        </p:spPr>
+        <p:txBody>
+          <a:bodyPr wrap="none" lIns="18288" rIns="18288" tIns="18288" bIns="18288" anchor="t">
+            <a:spAutoFit/>
+          </a:bodyPr>
+          <a:lstStyle/>
+          <a:p>
+            <a:pPr algn="l">
+              <a:spcAft>
+                <a:spcPts val="0"/>
+              </a:spcAft>
+            </a:pPr>
+            <a:r>
+              <a:rPr sz="1150" b="1" i="0">
+                <a:solidFill>
+                  <a:srgbClr val="E7F0F3"/>
+                </a:solidFill>
+                <a:latin typeface="Arial"/>
+              </a:rPr>
+              <a:t>C_b = ∂V_bl/∂p₀ = π b⁶ / (192 D_f),   V_bl = C_b p₀</a:t>
+            </a:r>
+          </a:p>
+        </p:txBody>
+      </p:sp>
+      <p:sp>
+        <p:nvSpPr>
+          <p:cNvPr id="48" name="C4-E19 text 46" descr="sci-ppt:o046"/>
+          <p:cNvSpPr txBox="1"/>
+          <p:nvPr/>
+        </p:nvSpPr>
+        <p:spPr>
+          <a:xfrm>
+            <a:off x="6995160" y="2377440"/>
+            <a:ext cx="4754880" cy="239395"/>
+          </a:xfrm>
+          <a:prstGeom prst="rect">
+            <a:avLst/>
+          </a:prstGeom>
+          <a:noFill/>
+          <a:effectLst/>
+        </p:spPr>
+        <p:txBody>
+          <a:bodyPr wrap="none" lIns="18288" rIns="18288" tIns="18288" bIns="18288" anchor="t">
+            <a:spAutoFit/>
+          </a:bodyPr>
+          <a:lstStyle/>
+          <a:p>
+            <a:pPr algn="l">
+              <a:spcAft>
+                <a:spcPts val="0"/>
+              </a:spcAft>
+            </a:pPr>
+            <a:r>
+              <a:rPr sz="1250" b="1" i="0">
+                <a:solidFill>
+                  <a:srgbClr val="E7F0F3"/>
+                </a:solidFill>
+                <a:latin typeface="Arial"/>
+              </a:rPr>
+              <a:t>U_b = V_bl² / (2C_b) = p₀V_bl / 2</a:t>
+            </a:r>
+          </a:p>
+        </p:txBody>
+      </p:sp>
+      <p:sp>
+        <p:nvSpPr>
+          <p:cNvPr id="49" name="C4-E19 text 47" descr="sci-ppt:o047"/>
+          <p:cNvSpPr txBox="1"/>
+          <p:nvPr/>
+        </p:nvSpPr>
+        <p:spPr>
+          <a:xfrm>
+            <a:off x="6995160" y="2880360"/>
+            <a:ext cx="4754880" cy="239395"/>
+          </a:xfrm>
+          <a:prstGeom prst="rect">
+            <a:avLst/>
+          </a:prstGeom>
+          <a:noFill/>
+          <a:effectLst/>
+        </p:spPr>
+        <p:txBody>
+          <a:bodyPr wrap="none" lIns="18288" rIns="18288" tIns="18288" bIns="18288" anchor="t">
+            <a:spAutoFit/>
+          </a:bodyPr>
+          <a:lstStyle/>
+          <a:p>
+            <a:pPr algn="l">
+              <a:spcAft>
+                <a:spcPts val="0"/>
+              </a:spcAft>
+            </a:pPr>
+            <a:r>
+              <a:rPr sz="1250" b="1" i="0">
+                <a:solidFill>
+                  <a:srgbClr val="F2B880"/>
+                </a:solidFill>
+                <a:latin typeface="Arial"/>
+              </a:rPr>
+              <a:t>𝒫 = U_b − p₀V_bl = −π p₀² b⁶ / (384 D_f)</a:t>
+            </a:r>
+          </a:p>
+        </p:txBody>
+      </p:sp>
+      <p:sp>
+        <p:nvSpPr>
+          <p:cNvPr id="50" name="C4-E19 text 48" descr="sci-ppt:o048"/>
+          <p:cNvSpPr txBox="1"/>
+          <p:nvPr/>
+        </p:nvSpPr>
+        <p:spPr>
+          <a:xfrm>
+            <a:off x="6995160" y="3566160"/>
+            <a:ext cx="4754880" cy="417576"/>
+          </a:xfrm>
+          <a:prstGeom prst="rect">
+            <a:avLst/>
+          </a:prstGeom>
+          <a:noFill/>
+          <a:effectLst/>
+        </p:spPr>
+        <p:txBody>
+          <a:bodyPr wrap="none" lIns="18288" rIns="18288" tIns="18288" bIns="18288" anchor="t">
+            <a:spAutoFit/>
+          </a:bodyPr>
+          <a:lstStyle/>
+          <a:p>
+            <a:pPr algn="l">
+              <a:spcAft>
+                <a:spcPts val="0"/>
+              </a:spcAft>
+            </a:pPr>
+            <a:r>
+              <a:rPr sz="1200" b="0" i="0">
                 <a:solidFill>
                   <a:srgbClr val="B4C7D2"/>
                 </a:solidFill>
                 <a:latin typeface="Arial"/>
               </a:rPr>
-              <a:t>• p₀ — maintained source pressure</a:t>
-            </a:r>
-          </a:p>
-        </p:txBody>
-      </p:sp>
-      <p:sp>
-        <p:nvSpPr>
-          <p:cNvPr id="14" name="C4-E19 text 12" descr="sci-ppt:o012"/>
+              <a:t>Half of the source work is stored; the other half is the</a:t>
+            </a:r>
+          </a:p>
+          <a:p>
+            <a:pPr algn="l">
+              <a:spcAft>
+                <a:spcPts val="0"/>
+              </a:spcAft>
+            </a:pPr>
+            <a:r>
+              <a:rPr sz="1200" b="0" i="0">
+                <a:solidFill>
+                  <a:srgbClr val="B4C7D2"/>
+                </a:solidFill>
+                <a:latin typeface="Arial"/>
+              </a:rPr>
+              <a:t>loss of potential.</a:t>
+            </a:r>
+          </a:p>
+        </p:txBody>
+      </p:sp>
+      <p:sp>
+        <p:nvSpPr>
+          <p:cNvPr id="51" name="C4-E19 text 49" descr="sci-ppt:o049"/>
           <p:cNvSpPr txBox="1"/>
           <p:nvPr/>
         </p:nvSpPr>
         <p:spPr>
           <a:xfrm>
-            <a:off x="6217920" y="4096512"/>
-            <a:ext cx="5715000" cy="246888"/>
+            <a:off x="914400" y="5486400"/>
+            <a:ext cx="10972800" cy="239395"/>
           </a:xfrm>
           <a:prstGeom prst="rect">
             <a:avLst/>
@@ -3520,7 +5554,7 @@
           <a:effectLst/>
         </p:spPr>
         <p:txBody>
-          <a:bodyPr wrap="square" lIns="27432" rIns="27432" tIns="18288" bIns="18288" anchor="ctr">
+          <a:bodyPr wrap="none" lIns="18288" rIns="18288" tIns="18288" bIns="18288" anchor="t">
             <a:spAutoFit/>
           </a:bodyPr>
           <a:lstStyle/>
@@ -3531,27 +5565,27 @@
               </a:spcAft>
             </a:pPr>
             <a:r>
-              <a:rPr sz="1150" b="0" i="0">
+              <a:rPr sz="1250" b="0" i="0">
                 <a:solidFill>
-                  <a:srgbClr val="B4C7D2"/>
+                  <a:srgbClr val="E7F0F3"/>
                 </a:solidFill>
                 <a:latin typeface="Arial"/>
               </a:rPr>
-              <a:t>• V_bl, v — cavity volume</a:t>
-            </a:r>
-          </a:p>
-        </p:txBody>
-      </p:sp>
-      <p:sp>
-        <p:nvSpPr>
-          <p:cNvPr id="15" name="C4-E19 text 13" descr="sci-ppt:o013"/>
+              <a:t>With p₀ held fixed the source does work p₀V; the total potential is negative: the system gains energy by opening.</a:t>
+            </a:r>
+          </a:p>
+        </p:txBody>
+      </p:sp>
+      <p:sp>
+        <p:nvSpPr>
+          <p:cNvPr id="52" name="C4-E19 text 50" descr="sci-ppt:o050"/>
           <p:cNvSpPr txBox="1"/>
           <p:nvPr/>
         </p:nvSpPr>
         <p:spPr>
           <a:xfrm>
-            <a:off x="320040" y="4329684"/>
-            <a:ext cx="5715000" cy="246888"/>
+            <a:off x="320040" y="6510528"/>
+            <a:ext cx="11521440" cy="200660"/>
           </a:xfrm>
           <a:prstGeom prst="rect">
             <a:avLst/>
@@ -3560,247 +5594,7 @@
           <a:effectLst/>
         </p:spPr>
         <p:txBody>
-          <a:bodyPr wrap="square" lIns="27432" rIns="27432" tIns="18288" bIns="18288" anchor="ctr">
-            <a:spAutoFit/>
-          </a:bodyPr>
-          <a:lstStyle/>
-          <a:p>
-            <a:pPr algn="l">
-              <a:spcAft>
-                <a:spcPts val="0"/>
-              </a:spcAft>
-            </a:pPr>
-            <a:r>
-              <a:rPr sz="1150" b="0" i="0">
-                <a:solidFill>
-                  <a:srgbClr val="B4C7D2"/>
-                </a:solidFill>
-                <a:latin typeface="Arial"/>
-              </a:rPr>
-              <a:t>• C_b — volume compliance</a:t>
-            </a:r>
-          </a:p>
-        </p:txBody>
-      </p:sp>
-      <p:sp>
-        <p:nvSpPr>
-          <p:cNvPr id="16" name="C4-E19 text 14" descr="sci-ppt:o014"/>
-          <p:cNvSpPr txBox="1"/>
-          <p:nvPr/>
-        </p:nvSpPr>
-        <p:spPr>
-          <a:xfrm>
-            <a:off x="6217920" y="4329684"/>
-            <a:ext cx="5715000" cy="246888"/>
-          </a:xfrm>
-          <a:prstGeom prst="rect">
-            <a:avLst/>
-          </a:prstGeom>
-          <a:noFill/>
-          <a:effectLst/>
-        </p:spPr>
-        <p:txBody>
-          <a:bodyPr wrap="square" lIns="27432" rIns="27432" tIns="18288" bIns="18288" anchor="ctr">
-            <a:spAutoFit/>
-          </a:bodyPr>
-          <a:lstStyle/>
-          <a:p>
-            <a:pPr algn="l">
-              <a:spcAft>
-                <a:spcPts val="0"/>
-              </a:spcAft>
-            </a:pPr>
-            <a:r>
-              <a:rPr sz="1150" b="0" i="0">
-                <a:solidFill>
-                  <a:srgbClr val="B4C7D2"/>
-                </a:solidFill>
-                <a:latin typeface="Arial"/>
-              </a:rPr>
-              <a:t>• U_b = ½p₀V_bl — plate storage</a:t>
-            </a:r>
-          </a:p>
-        </p:txBody>
-      </p:sp>
-      <p:sp>
-        <p:nvSpPr>
-          <p:cNvPr id="17" name="C4-E19 text 15" descr="sci-ppt:o015"/>
-          <p:cNvSpPr txBox="1"/>
-          <p:nvPr/>
-        </p:nvSpPr>
-        <p:spPr>
-          <a:xfrm>
-            <a:off x="320040" y="4562856"/>
-            <a:ext cx="5715000" cy="246888"/>
-          </a:xfrm>
-          <a:prstGeom prst="rect">
-            <a:avLst/>
-          </a:prstGeom>
-          <a:noFill/>
-          <a:effectLst/>
-        </p:spPr>
-        <p:txBody>
-          <a:bodyPr wrap="square" lIns="27432" rIns="27432" tIns="18288" bIns="18288" anchor="ctr">
-            <a:spAutoFit/>
-          </a:bodyPr>
-          <a:lstStyle/>
-          <a:p>
-            <a:pPr algn="l">
-              <a:spcAft>
-                <a:spcPts val="0"/>
-              </a:spcAft>
-            </a:pPr>
-            <a:r>
-              <a:rPr sz="1150" b="0" i="0">
-                <a:solidFill>
-                  <a:srgbClr val="B4C7D2"/>
-                </a:solidFill>
-                <a:latin typeface="Arial"/>
-              </a:rPr>
-              <a:t>• −p₀V_bl — source potential</a:t>
-            </a:r>
-          </a:p>
-        </p:txBody>
-      </p:sp>
-      <p:sp>
-        <p:nvSpPr>
-          <p:cNvPr id="18" name="C4-E19 text 16" descr="sci-ppt:o016"/>
-          <p:cNvSpPr txBox="1"/>
-          <p:nvPr/>
-        </p:nvSpPr>
-        <p:spPr>
-          <a:xfrm>
-            <a:off x="6217920" y="4562856"/>
-            <a:ext cx="5715000" cy="246888"/>
-          </a:xfrm>
-          <a:prstGeom prst="rect">
-            <a:avLst/>
-          </a:prstGeom>
-          <a:noFill/>
-          <a:effectLst/>
-        </p:spPr>
-        <p:txBody>
-          <a:bodyPr wrap="square" lIns="27432" rIns="27432" tIns="18288" bIns="18288" anchor="ctr">
-            <a:spAutoFit/>
-          </a:bodyPr>
-          <a:lstStyle/>
-          <a:p>
-            <a:pPr algn="l">
-              <a:spcAft>
-                <a:spcPts val="0"/>
-              </a:spcAft>
-            </a:pPr>
-            <a:r>
-              <a:rPr sz="1150" b="0" i="0">
-                <a:solidFill>
-                  <a:srgbClr val="B4C7D2"/>
-                </a:solidFill>
-                <a:latin typeface="Arial"/>
-              </a:rPr>
-              <a:t>• P = U_b − p₀V_bl</a:t>
-            </a:r>
-          </a:p>
-        </p:txBody>
-      </p:sp>
-      <p:sp>
-        <p:nvSpPr>
-          <p:cNvPr id="19" name="C4-E19 text 17" descr="sci-ppt:o017"/>
-          <p:cNvSpPr txBox="1"/>
-          <p:nvPr/>
-        </p:nvSpPr>
-        <p:spPr>
-          <a:xfrm>
-            <a:off x="320040" y="4796028"/>
-            <a:ext cx="5715000" cy="246888"/>
-          </a:xfrm>
-          <a:prstGeom prst="rect">
-            <a:avLst/>
-          </a:prstGeom>
-          <a:noFill/>
-          <a:effectLst/>
-        </p:spPr>
-        <p:txBody>
-          <a:bodyPr wrap="square" lIns="27432" rIns="27432" tIns="18288" bIns="18288" anchor="ctr">
-            <a:spAutoFit/>
-          </a:bodyPr>
-          <a:lstStyle/>
-          <a:p>
-            <a:pPr algn="l">
-              <a:spcAft>
-                <a:spcPts val="0"/>
-              </a:spcAft>
-            </a:pPr>
-            <a:r>
-              <a:rPr sz="1150" b="0" i="0">
-                <a:solidFill>
-                  <a:srgbClr val="B4C7D2"/>
-                </a:solidFill>
-                <a:latin typeface="Arial"/>
-              </a:rPr>
-              <a:t>• b, D_f — geometry and stiffness</a:t>
-            </a:r>
-          </a:p>
-        </p:txBody>
-      </p:sp>
-      <p:sp>
-        <p:nvSpPr>
-          <p:cNvPr id="20" name="C4-E19 text 18" descr="sci-ppt:o018"/>
-          <p:cNvSpPr txBox="1"/>
-          <p:nvPr/>
-        </p:nvSpPr>
-        <p:spPr>
-          <a:xfrm>
-            <a:off x="320040" y="5596128"/>
-            <a:ext cx="11430000" cy="292608"/>
-          </a:xfrm>
-          <a:prstGeom prst="rect">
-            <a:avLst/>
-          </a:prstGeom>
-          <a:noFill/>
-          <a:effectLst/>
-        </p:spPr>
-        <p:txBody>
-          <a:bodyPr wrap="square" lIns="27432" rIns="27432" tIns="18288" bIns="18288" anchor="ctr">
-            <a:spAutoFit/>
-          </a:bodyPr>
-          <a:lstStyle/>
-          <a:p>
-            <a:pPr algn="l">
-              <a:spcAft>
-                <a:spcPts val="0"/>
-              </a:spcAft>
-            </a:pPr>
-            <a:r>
-              <a:rPr sz="1150" b="0" i="0">
-                <a:solidFill>
-                  <a:srgbClr val="8EDBD4"/>
-                </a:solidFill>
-                <a:latin typeface="Arial"/>
-              </a:rPr>
-              <a:t>The external pressure reservoir supplies work as the crack grows.</a:t>
-            </a:r>
-          </a:p>
-        </p:txBody>
-      </p:sp>
-      <p:sp>
-        <p:nvSpPr>
-          <p:cNvPr id="21" name="C4-E19 text 19" descr="sci-ppt:o019"/>
-          <p:cNvSpPr txBox="1"/>
-          <p:nvPr/>
-        </p:nvSpPr>
-        <p:spPr>
-          <a:xfrm>
-            <a:off x="320040" y="6473952"/>
-            <a:ext cx="11430000" cy="256032"/>
-          </a:xfrm>
-          <a:prstGeom prst="rect">
-            <a:avLst/>
-          </a:prstGeom>
-          <a:noFill/>
-          <a:effectLst/>
-        </p:spPr>
-        <p:txBody>
-          <a:bodyPr wrap="square" lIns="27432" rIns="27432" tIns="18288" bIns="18288" anchor="ctr">
+          <a:bodyPr wrap="none" lIns="18288" rIns="18288" tIns="18288" bIns="18288" anchor="t">
             <a:spAutoFit/>
           </a:bodyPr>
           <a:lstStyle/>
@@ -3817,7 +5611,7 @@
                 </a:solidFill>
                 <a:latin typeface="Arial"/>
               </a:rPr>
-              <a:t>Model schematic; geometry is not to scale.</a:t>
+              <a:t>Potential under maintained pressure, Eq. C4-E19 (normalised: V* = 1, p* = 1; U_b = V²/2 along the linear compliance).</a:t>
             </a:r>
           </a:p>
         </p:txBody>
